--- a/deliverables/out/SA_Portfolio_Deck.pptx
+++ b/deliverables/out/SA_Portfolio_Deck.pptx
@@ -119,12 +119,12 @@
   <p:extLst>
     <p:ext uri="{521415D9-36F7-43E2-AB2F-B90AF26B5E84}">
       <p14:sectionLst xmlns:p14="http://schemas.microsoft.com/office/powerpoint/2010/main">
-        <p14:section name="Opening" id="{24b86cf8-6ef0-c843-6a60-1d06c68f6b59}">
+        <p14:section name="Opening" id="{a2ebe612-3b85-6819-1851-0bd92cb33dcf}">
           <p14:sldIdLst>
             <p14:sldId id="256"/>
           </p14:sldIdLst>
         </p14:section>
-        <p14:section name="Analysis" id="{c2ba1796-fc07-84a0-916d-deb79992c8f8}">
+        <p14:section name="Analysis" id="{c594f6af-33d4-89a7-420d-1f9eed2744b9}">
           <p14:sldIdLst>
             <p14:sldId id="257"/>
             <p14:sldId id="258"/>
@@ -133,18 +133,18 @@
             <p14:sldId id="261"/>
           </p14:sldIdLst>
         </p14:section>
-        <p14:section name="Portfolio" id="{2a52df54-8dbe-7e18-db34-79cabe84b741}">
+        <p14:section name="Portfolio" id="{9ccc9df6-dce6-8fd3-0163-8b05b6400012}">
           <p14:sldIdLst>
             <p14:sldId id="262"/>
             <p14:sldId id="263"/>
           </p14:sldIdLst>
         </p14:section>
-        <p14:section name="Close" id="{17b32574-4a0b-cafc-bd58-83211e241a47}">
+        <p14:section name="Close" id="{3092bfba-b834-cb05-a38b-28ebf7d66a21}">
           <p14:sldIdLst>
             <p14:sldId id="264"/>
           </p14:sldIdLst>
         </p14:section>
-        <p14:section name="Appendix" id="{35c9258a-28d2-3e2c-3733-ba94bc987e16}">
+        <p14:section name="Appendix" id="{572450e6-7973-c434-6eb1-5902ad6ac4e2}">
           <p14:sldIdLst>
             <p14:sldId id="265"/>
             <p14:sldId id="266"/>
@@ -162,6 +162,255 @@
 </file>
 
 <file path=ppt/charts/chart1.xml><?xml version="1.0" encoding="utf-8"?>
+<c:chartSpace xmlns:c="http://schemas.openxmlformats.org/drawingml/2006/chart" xmlns:a="http://schemas.openxmlformats.org/drawingml/2006/main" xmlns:r="http://schemas.openxmlformats.org/officeDocument/2006/relationships">
+  <c:date1904 val="0"/>
+  <c:roundedCorners val="1"/>
+  <c:chart>
+    <c:autoTitleDeleted val="1"/>
+    <c:plotArea>
+      <c:layout/>
+      <c:doughnutChart>
+        <c:varyColors val="1"/>
+        <c:ser>
+          <c:idx val="0"/>
+          <c:order val="0"/>
+          <c:tx>
+            <c:strRef>
+              <c:f>Sheet1!$B$1</c:f>
+              <c:strCache>
+                <c:ptCount val="1"/>
+                <c:pt idx="0">
+                  <c:v>Weight in P</c:v>
+                </c:pt>
+              </c:strCache>
+            </c:strRef>
+          </c:tx>
+          <c:spPr>
+            <a:solidFill>
+              <a:schemeClr val="accent1"/>
+            </a:solidFill>
+            <a:ln w="9525" cap="flat">
+              <a:solidFill>
+                <a:srgbClr val="F9F9F9"/>
+              </a:solidFill>
+              <a:prstDash val="solid"/>
+              <a:round/>
+            </a:ln>
+            <a:effectLst/>
+          </c:spPr>
+          <c:dPt>
+            <c:idx val="0"/>
+            <c:bubble3D val="0"/>
+            <c:spPr>
+              <a:solidFill>
+                <a:srgbClr val="3A7C74"/>
+              </a:solidFill>
+              <a:ln w="25400" cap="flat">
+                <a:solidFill>
+                  <a:srgbClr val="1D2C62"/>
+                </a:solidFill>
+                <a:prstDash val="solid"/>
+                <a:round/>
+              </a:ln>
+              <a:effectLst/>
+            </c:spPr>
+          </c:dPt>
+          <c:dPt>
+            <c:idx val="1"/>
+            <c:bubble3D val="0"/>
+            <c:spPr>
+              <a:solidFill>
+                <a:srgbClr val="EBB24D"/>
+              </a:solidFill>
+              <a:ln w="25400" cap="flat">
+                <a:solidFill>
+                  <a:srgbClr val="1D2C62"/>
+                </a:solidFill>
+                <a:prstDash val="solid"/>
+                <a:round/>
+              </a:ln>
+              <a:effectLst/>
+            </c:spPr>
+          </c:dPt>
+          <c:dPt>
+            <c:idx val="2"/>
+            <c:bubble3D val="0"/>
+            <c:spPr>
+              <a:solidFill>
+                <a:srgbClr val="C84D00"/>
+              </a:solidFill>
+              <a:ln w="25400" cap="flat">
+                <a:solidFill>
+                  <a:srgbClr val="1D2C62"/>
+                </a:solidFill>
+                <a:prstDash val="solid"/>
+                <a:round/>
+              </a:ln>
+              <a:effectLst/>
+            </c:spPr>
+          </c:dPt>
+          <c:dLbls>
+            <c:dLbl>
+              <c:idx val="0"/>
+              <c:numFmt formatCode="0%" sourceLinked="0"/>
+              <c:spPr/>
+              <c:txPr>
+                <a:bodyPr/>
+                <a:lstStyle/>
+                <a:p>
+                  <a:pPr>
+                    <a:defRPr sz="1200" b="1" i="0" u="none" strike="noStrike">
+                      <a:solidFill>
+                        <a:srgbClr val="FFFFFF"/>
+                      </a:solidFill>
+                      <a:latin typeface="+mn-lt"/>
+                    </a:defRPr>
+                  </a:pPr>
+                </a:p>
+              </c:txPr>
+              <c:showLegendKey val="0"/>
+              <c:showVal val="0"/>
+              <c:showCatName val="0"/>
+              <c:showSerName val="0"/>
+              <c:showPercent val="1"/>
+              <c:showBubbleSize val="0"/>
+            </c:dLbl>
+            <c:dLbl>
+              <c:idx val="1"/>
+              <c:numFmt formatCode="0%" sourceLinked="0"/>
+              <c:spPr/>
+              <c:txPr>
+                <a:bodyPr/>
+                <a:lstStyle/>
+                <a:p>
+                  <a:pPr>
+                    <a:defRPr sz="1200" b="1" i="0" u="none" strike="noStrike">
+                      <a:solidFill>
+                        <a:srgbClr val="FFFFFF"/>
+                      </a:solidFill>
+                      <a:latin typeface="+mn-lt"/>
+                    </a:defRPr>
+                  </a:pPr>
+                </a:p>
+              </c:txPr>
+              <c:showLegendKey val="0"/>
+              <c:showVal val="0"/>
+              <c:showCatName val="0"/>
+              <c:showSerName val="0"/>
+              <c:showPercent val="1"/>
+              <c:showBubbleSize val="0"/>
+            </c:dLbl>
+            <c:dLbl>
+              <c:idx val="2"/>
+              <c:numFmt formatCode="0%" sourceLinked="0"/>
+              <c:spPr/>
+              <c:txPr>
+                <a:bodyPr/>
+                <a:lstStyle/>
+                <a:p>
+                  <a:pPr>
+                    <a:defRPr sz="1200" b="1" i="0" u="none" strike="noStrike">
+                      <a:solidFill>
+                        <a:srgbClr val="FFFFFF"/>
+                      </a:solidFill>
+                      <a:latin typeface="+mn-lt"/>
+                    </a:defRPr>
+                  </a:pPr>
+                </a:p>
+              </c:txPr>
+              <c:showLegendKey val="0"/>
+              <c:showVal val="0"/>
+              <c:showCatName val="0"/>
+              <c:showSerName val="0"/>
+              <c:showPercent val="1"/>
+              <c:showBubbleSize val="0"/>
+            </c:dLbl>
+            <c:numFmt formatCode="0%" sourceLinked="0"/>
+            <c:txPr>
+              <a:bodyPr/>
+              <a:lstStyle/>
+              <a:p>
+                <a:pPr>
+                  <a:defRPr sz="1800" b="1" i="0" u="none" strike="noStrike">
+                    <a:solidFill>
+                      <a:srgbClr val="000000"/>
+                    </a:solidFill>
+                    <a:latin typeface="Arial"/>
+                  </a:defRPr>
+                </a:pPr>
+              </a:p>
+            </c:txPr>
+            <c:showLegendKey val="0"/>
+            <c:showVal val="0"/>
+            <c:showCatName val="1"/>
+            <c:showSerName val="0"/>
+            <c:showPercent val="1"/>
+            <c:showBubbleSize val="0"/>
+            <c:showLeaderLines val="0"/>
+          </c:dLbls>
+          <c:cat>
+            <c:strRef>
+              <c:f>Sheet1!$A$2:$A$4</c:f>
+              <c:strCache>
+                <c:ptCount val="3"/>
+                <c:pt idx="0">
+                  <c:v>HUL</c:v>
+                </c:pt>
+                <c:pt idx="1">
+                  <c:v>Sun Pharma</c:v>
+                </c:pt>
+                <c:pt idx="2">
+                  <c:v>ICICI Bank</c:v>
+                </c:pt>
+              </c:strCache>
+            </c:strRef>
+          </c:cat>
+          <c:val>
+            <c:numRef>
+              <c:f>Sheet1!$B$2:$B$4</c:f>
+              <c:numCache>
+                <c:ptCount val="3"/>
+                <c:pt idx="0">
+                  <c:v>0.30685972985808274</c:v>
+                </c:pt>
+                <c:pt idx="1">
+                  <c:v>0.19248607535269438</c:v>
+                </c:pt>
+                <c:pt idx="2">
+                  <c:v>0.500654194789223</c:v>
+                </c:pt>
+              </c:numCache>
+            </c:numRef>
+          </c:val>
+        </c:ser>
+        <c:firstSliceAng val="0"/>
+        <c:holeSize val="62"/>
+      </c:doughnutChart>
+      <c:spPr>
+        <a:noFill/>
+        <a:ln>
+          <a:noFill/>
+        </a:ln>
+        <a:effectLst/>
+      </c:spPr>
+    </c:plotArea>
+    <c:plotVisOnly val="1"/>
+    <c:dispBlanksAs val="span"/>
+  </c:chart>
+  <c:spPr>
+    <a:noFill/>
+    <a:ln>
+      <a:noFill/>
+    </a:ln>
+    <a:effectLst/>
+  </c:spPr>
+  <c:externalData r:id="rId1">
+    <c:autoUpdate val="0"/>
+  </c:externalData>
+</c:chartSpace>
+</file>
+
+<file path=ppt/charts/chart2.xml><?xml version="1.0" encoding="utf-8"?>
 <c:chartSpace xmlns:c="http://schemas.openxmlformats.org/drawingml/2006/chart" xmlns:a="http://schemas.openxmlformats.org/drawingml/2006/main" xmlns:r="http://schemas.openxmlformats.org/officeDocument/2006/relationships">
   <c:date1904 val="0"/>
   <c:roundedCorners val="1"/>
@@ -659,7 +908,7 @@
 </c:chartSpace>
 </file>
 
-<file path=ppt/charts/chart2.xml><?xml version="1.0" encoding="utf-8"?>
+<file path=ppt/charts/chart3.xml><?xml version="1.0" encoding="utf-8"?>
 <c:chartSpace xmlns:c="http://schemas.openxmlformats.org/drawingml/2006/chart" xmlns:a="http://schemas.openxmlformats.org/drawingml/2006/main" xmlns:r="http://schemas.openxmlformats.org/officeDocument/2006/relationships">
   <c:date1904 val="0"/>
   <c:roundedCorners val="1"/>
@@ -1487,7 +1736,7 @@
           <a:p>
             <a:r>
               <a:rPr lang="en-US" dirty="0"/>
-              <a:t>[0:30] Ten thousand rupees a month. That is what each of us expects to invest after graduation, and this project asks one question: should that money own Hindustan Unilever, Sun Pharma and ICICI Bank, and how? Our answer has three moves. Pick three businesses whose returns don't move together. Price them honestly: all three trade above our blended values, so we buy slowly. And size the portfolio to each of us: 31, 19, 50 percent, as a satellite around a Nifty index core.</a:t>
+              <a:t>[0:30] Our project is an AI-augmented security analysis of three companies, Hindustan Unilever, Sun Pharma and ICICI Bank, built around one practical question: if each of us invests ten thousand rupees a month after graduation, should that money own them, and how? Our answer has three moves. Pick three businesses whose returns don't move together. Price them honestly: all three trade above our blended values, so we buy slowly. And size the portfolio to each of us: 31, 19, 50 percent, as a satellite around a Nifty index core.</a:t>
             </a:r>
             <a:endParaRPr lang="en-US" dirty="0"/>
           </a:p>
@@ -2744,8 +2993,8 @@
         </p:nvSpPr>
         <p:spPr>
           <a:xfrm>
-            <a:off x="548640" y="1051560"/>
-            <a:ext cx="6949440" cy="1051560"/>
+            <a:off x="548640" y="960120"/>
+            <a:ext cx="6766560" cy="1645920"/>
           </a:xfrm>
           <a:prstGeom prst="rect">
             <a:avLst/>
@@ -2758,7 +3007,7 @@
           <a:lstStyle>
             <a:lvl1pPr algn="l" indent="0" marL="0">
               <a:buNone/>
-              <a:defRPr lang="en-US" sz="6000" b="1" dirty="0">
+              <a:defRPr lang="en-US" sz="4400" b="1" dirty="0">
                 <a:solidFill>
                   <a:schemeClr val="accent1"/>
                 </a:solidFill>
@@ -2769,7 +3018,7 @@
             <a:pPr algn="l" indent="0" marL="0">
               <a:buNone/>
             </a:pPr>
-            <a:endParaRPr lang="en-US" sz="6000" dirty="0"/>
+            <a:endParaRPr lang="en-US" sz="4400" dirty="0"/>
           </a:p>
         </p:txBody>
       </p:sp>
@@ -2783,8 +3032,8 @@
         </p:nvSpPr>
         <p:spPr>
           <a:xfrm>
-            <a:off x="548640" y="2286000"/>
-            <a:ext cx="6675120" cy="1234440"/>
+            <a:off x="548640" y="2743200"/>
+            <a:ext cx="6400800" cy="822960"/>
           </a:xfrm>
           <a:prstGeom prst="rect">
             <a:avLst/>
@@ -2797,7 +3046,7 @@
           <a:lstStyle>
             <a:lvl1pPr algn="l" indent="0" marL="0">
               <a:buNone/>
-              <a:defRPr lang="en-US" sz="2400" b="1" dirty="0">
+              <a:defRPr lang="en-US" sz="1800" dirty="0">
                 <a:solidFill>
                   <a:schemeClr val="tx1"/>
                 </a:solidFill>
@@ -2808,7 +3057,7 @@
             <a:pPr algn="l" indent="0" marL="0">
               <a:buNone/>
             </a:pPr>
-            <a:endParaRPr lang="en-US" sz="2400" dirty="0"/>
+            <a:endParaRPr lang="en-US" sz="1800" dirty="0"/>
           </a:p>
         </p:txBody>
       </p:sp>
@@ -4156,7 +4405,7 @@
                   <a:schemeClr val="tx1"/>
                 </a:solidFill>
               </a:rPr>
-              <a:t>SECURITY ANALYSIS (BBAT35F97) · DATA AS OF 13 OCT 2026</a:t>
+              <a:t>SECURITY ANALYSIS (BBAT35F97) · TAPMI · BBA(H) SEMESTER V</a:t>
             </a:r>
             <a:endParaRPr lang="en-US" sz="1000" dirty="0"/>
           </a:p>
@@ -4172,8 +4421,8 @@
         </p:nvSpPr>
         <p:spPr>
           <a:xfrm>
-            <a:off x="548640" y="1051560"/>
-            <a:ext cx="6949440" cy="1051560"/>
+            <a:off x="548640" y="960120"/>
+            <a:ext cx="6766560" cy="1645920"/>
           </a:xfrm>
           <a:prstGeom prst="rect">
             <a:avLst/>
@@ -4189,14 +4438,14 @@
               <a:buNone/>
             </a:pPr>
             <a:r>
-              <a:rPr lang="en-US" sz="6000" b="1" dirty="0">
+              <a:rPr lang="en-US" sz="4400" b="1" dirty="0">
                 <a:solidFill>
                   <a:schemeClr val="accent1"/>
                 </a:solidFill>
               </a:rPr>
-              <a:t>₹10,000 A MONTH</a:t>
-            </a:r>
-            <a:endParaRPr lang="en-US" sz="6000" dirty="0"/>
+              <a:t>AI-AUGMENTED SECURITY ANALYSIS</a:t>
+            </a:r>
+            <a:endParaRPr lang="en-US" sz="4400" dirty="0"/>
           </a:p>
         </p:txBody>
       </p:sp>
@@ -4210,8 +4459,8 @@
         </p:nvSpPr>
         <p:spPr>
           <a:xfrm>
-            <a:off x="548640" y="2286000"/>
-            <a:ext cx="6675120" cy="1234440"/>
+            <a:off x="548640" y="2743200"/>
+            <a:ext cx="6400800" cy="822960"/>
           </a:xfrm>
           <a:prstGeom prst="rect">
             <a:avLst/>
@@ -4227,264 +4476,636 @@
               <a:buNone/>
             </a:pPr>
             <a:r>
-              <a:rPr lang="en-US" sz="2400" b="1" dirty="0">
+              <a:rPr lang="en-US" sz="1800" dirty="0">
                 <a:solidFill>
                   <a:schemeClr val="tx1"/>
                 </a:solidFill>
               </a:rPr>
-              <a:t>INTO HUL, SUN PHARMA AND ICICI BANK: HOW A STUDENT SHOULD OWN THEM</a:t>
-            </a:r>
-            <a:endParaRPr lang="en-US" sz="2400" dirty="0"/>
-          </a:p>
-        </p:txBody>
-      </p:sp>
-      <p:sp>
-        <p:nvSpPr>
-          <p:cNvPr id="5" name="Text 3"/>
+              <a:t>Valuing Hindustan Unilever, Sun Pharma and ICICI Bank, and building a long-term portfolio from them</a:t>
+            </a:r>
+            <a:endParaRPr lang="en-US" sz="1800" dirty="0"/>
+          </a:p>
+        </p:txBody>
+      </p:sp>
+      <p:sp>
+        <p:nvSpPr>
+          <p:cNvPr id="5" name="cover-HUL"/>
+          <p:cNvSpPr/>
+          <p:nvPr/>
+        </p:nvSpPr>
+        <p:spPr>
+          <a:xfrm>
+            <a:off x="548640" y="3840480"/>
+            <a:ext cx="2103120" cy="1783080"/>
+          </a:xfrm>
+          <a:prstGeom prst="rect">
+            <a:avLst/>
+          </a:prstGeom>
+          <a:solidFill>
+            <a:schemeClr val="bg1"/>
+          </a:solidFill>
+          <a:ln w="9525">
+            <a:solidFill>
+              <a:schemeClr val="accent6"/>
+            </a:solidFill>
+            <a:prstDash val="solid"/>
+          </a:ln>
+        </p:spPr>
+      </p:sp>
+      <p:sp>
+        <p:nvSpPr>
+          <p:cNvPr id="6" name="Shape 4"/>
+          <p:cNvSpPr/>
+          <p:nvPr/>
+        </p:nvSpPr>
+        <p:spPr>
+          <a:xfrm>
+            <a:off x="731520" y="4041648"/>
+            <a:ext cx="566928" cy="566928"/>
+          </a:xfrm>
+          <a:prstGeom prst="ellipse">
+            <a:avLst/>
+          </a:prstGeom>
+          <a:solidFill>
+            <a:schemeClr val="accent3"/>
+          </a:solidFill>
+          <a:ln w="12700">
+            <a:solidFill>
+              <a:schemeClr val="accent3"/>
+            </a:solidFill>
+            <a:prstDash val="solid"/>
+          </a:ln>
+        </p:spPr>
+      </p:sp>
+      <p:pic>
+        <p:nvPicPr>
+          <p:cNvPr id="7" name="cover-icon-HUL" descr="preencoded.png">    </p:cNvPr>
+          <p:cNvPicPr>
+            <a:picLocks noChangeAspect="1"/>
+          </p:cNvPicPr>
+          <p:nvPr/>
+        </p:nvPicPr>
+        <p:blipFill>
+          <a:blip r:embed="rId1"/>
+          <a:stretch>
+            <a:fillRect/>
+          </a:stretch>
+        </p:blipFill>
+        <p:spPr>
+          <a:xfrm>
+            <a:off x="854964" y="4165092"/>
+            <a:ext cx="320040" cy="320040"/>
+          </a:xfrm>
+          <a:prstGeom prst="rect">
+            <a:avLst/>
+          </a:prstGeom>
+        </p:spPr>
+      </p:pic>
+      <p:sp>
+        <p:nvSpPr>
+          <p:cNvPr id="8" name="Text 5"/>
           <p:cNvSpPr txBox="1"/>
           <p:nvPr/>
         </p:nvSpPr>
         <p:spPr>
           <a:xfrm>
-            <a:off x="548640" y="3611880"/>
-            <a:ext cx="6583680" cy="822960"/>
-          </a:xfrm>
-          <a:prstGeom prst="rect">
-            <a:avLst/>
-          </a:prstGeom>
-          <a:noFill/>
-          <a:ln/>
-        </p:spPr>
-        <p:txBody>
-          <a:bodyPr wrap="square" lIns="0" tIns="0" rIns="0" bIns="0" rtlCol="0" anchor="t"/>
-          <a:lstStyle/>
-          <a:p>
-            <a:pPr indent="0" marL="0">
-              <a:buNone/>
-            </a:pPr>
-            <a:r>
-              <a:rPr lang="en-US" sz="1400" dirty="0">
+            <a:off x="1444752" y="4078224"/>
+            <a:ext cx="1143000" cy="548640"/>
+          </a:xfrm>
+          <a:prstGeom prst="rect">
+            <a:avLst/>
+          </a:prstGeom>
+          <a:noFill/>
+          <a:ln/>
+        </p:spPr>
+        <p:txBody>
+          <a:bodyPr wrap="square" lIns="0" tIns="0" rIns="0" bIns="0" rtlCol="0" anchor="t"/>
+          <a:lstStyle/>
+          <a:p>
+            <a:pPr indent="0" marL="0">
+              <a:buNone/>
+            </a:pPr>
+            <a:r>
+              <a:rPr lang="en-US" sz="1000" b="1" spc="100" kern="0" dirty="0">
                 <a:solidFill>
                   <a:schemeClr val="tx2"/>
                 </a:solidFill>
               </a:rPr>
-              <a:t>Median 15-year corpus ₹64.8 lakh from ₹38.1 lakh invested, for a Balanced investor (A = 4), from a 10,000-path Monte Carlo of our portfolio.</a:t>
-            </a:r>
-            <a:endParaRPr lang="en-US" sz="1400" dirty="0"/>
-          </a:p>
-        </p:txBody>
-      </p:sp>
-      <p:sp>
-        <p:nvSpPr>
-          <p:cNvPr id="6" name="Text 4"/>
+              <a:t>FMCG</a:t>
+            </a:r>
+            <a:endParaRPr lang="en-US" sz="1000" dirty="0"/>
+          </a:p>
+          <a:p>
+            <a:pPr indent="0" marL="0">
+              <a:buNone/>
+            </a:pPr>
+            <a:r>
+              <a:rPr lang="en-US" sz="1300" b="1" dirty="0">
+                <a:solidFill>
+                  <a:schemeClr val="tx1"/>
+                </a:solidFill>
+              </a:rPr>
+              <a:t>31% OF P</a:t>
+            </a:r>
+            <a:endParaRPr lang="en-US" sz="1000" dirty="0"/>
+          </a:p>
+        </p:txBody>
+      </p:sp>
+      <p:sp>
+        <p:nvSpPr>
+          <p:cNvPr id="9" name="Text 6"/>
           <p:cNvSpPr txBox="1"/>
           <p:nvPr/>
         </p:nvSpPr>
         <p:spPr>
           <a:xfrm>
-            <a:off x="548640" y="4709160"/>
-            <a:ext cx="2103120" cy="457200"/>
-          </a:xfrm>
-          <a:prstGeom prst="rect">
-            <a:avLst/>
-          </a:prstGeom>
-          <a:noFill/>
-          <a:ln/>
-        </p:spPr>
-        <p:txBody>
-          <a:bodyPr wrap="square" lIns="0" tIns="0" rIns="0" bIns="0" rtlCol="0" anchor="t"/>
-          <a:lstStyle/>
-          <a:p>
-            <a:pPr indent="0" marL="0">
-              <a:buNone/>
-            </a:pPr>
-            <a:r>
-              <a:rPr lang="en-US" sz="2400" b="1" dirty="0">
+            <a:off x="731520" y="4800600"/>
+            <a:ext cx="1828800" cy="320040"/>
+          </a:xfrm>
+          <a:prstGeom prst="rect">
+            <a:avLst/>
+          </a:prstGeom>
+          <a:noFill/>
+          <a:ln/>
+        </p:spPr>
+        <p:txBody>
+          <a:bodyPr wrap="square" lIns="0" tIns="0" rIns="0" bIns="0" rtlCol="0" anchor="t"/>
+          <a:lstStyle/>
+          <a:p>
+            <a:pPr indent="0" marL="0">
+              <a:buNone/>
+            </a:pPr>
+            <a:r>
+              <a:rPr lang="en-US" sz="1500" b="1" dirty="0">
                 <a:solidFill>
                   <a:schemeClr val="tx1"/>
                 </a:solidFill>
               </a:rPr>
-              <a:t>0.34 vs 0.44</a:t>
-            </a:r>
-            <a:endParaRPr lang="en-US" sz="2400" dirty="0"/>
-          </a:p>
-        </p:txBody>
-      </p:sp>
-      <p:sp>
-        <p:nvSpPr>
-          <p:cNvPr id="7" name="Text 5"/>
+              <a:t>Hindustan Unilever</a:t>
+            </a:r>
+            <a:endParaRPr lang="en-US" sz="1500" dirty="0"/>
+          </a:p>
+        </p:txBody>
+      </p:sp>
+      <p:sp>
+        <p:nvSpPr>
+          <p:cNvPr id="10" name="Text 7"/>
           <p:cNvSpPr txBox="1"/>
           <p:nvPr/>
         </p:nvSpPr>
         <p:spPr>
           <a:xfrm>
-            <a:off x="548640" y="5193792"/>
-            <a:ext cx="2011680" cy="457200"/>
-          </a:xfrm>
-          <a:prstGeom prst="rect">
-            <a:avLst/>
-          </a:prstGeom>
-          <a:noFill/>
-          <a:ln/>
-        </p:spPr>
-        <p:txBody>
-          <a:bodyPr wrap="square" lIns="0" tIns="0" rIns="0" bIns="0" rtlCol="0" anchor="t"/>
-          <a:lstStyle/>
-          <a:p>
-            <a:pPr indent="0" marL="0">
-              <a:buNone/>
-            </a:pPr>
-            <a:r>
-              <a:rPr lang="en-US" sz="1000" b="1" dirty="0">
+            <a:off x="731520" y="5166360"/>
+            <a:ext cx="1828800" cy="274320"/>
+          </a:xfrm>
+          <a:prstGeom prst="rect">
+            <a:avLst/>
+          </a:prstGeom>
+          <a:noFill/>
+          <a:ln/>
+        </p:spPr>
+        <p:txBody>
+          <a:bodyPr wrap="square" lIns="0" tIns="0" rIns="0" bIns="0" rtlCol="0" anchor="t"/>
+          <a:lstStyle/>
+          <a:p>
+            <a:pPr indent="0" marL="0">
+              <a:buNone/>
+            </a:pPr>
+            <a:r>
+              <a:rPr lang="en-US" sz="1100" dirty="0">
                 <a:solidFill>
                   <a:schemeClr val="tx2"/>
                 </a:solidFill>
               </a:rPr>
-              <a:t>SHARPE RATIO: OUR 3 STOCKS VS THE NIFTY</a:t>
+              <a:t>β 0.60 · CAGR 9.6%</a:t>
+            </a:r>
+            <a:endParaRPr lang="en-US" sz="1100" dirty="0"/>
+          </a:p>
+        </p:txBody>
+      </p:sp>
+      <p:sp>
+        <p:nvSpPr>
+          <p:cNvPr id="11" name="cover-Sun Pharma"/>
+          <p:cNvSpPr/>
+          <p:nvPr/>
+        </p:nvSpPr>
+        <p:spPr>
+          <a:xfrm>
+            <a:off x="2834640" y="3840480"/>
+            <a:ext cx="2103120" cy="1783080"/>
+          </a:xfrm>
+          <a:prstGeom prst="rect">
+            <a:avLst/>
+          </a:prstGeom>
+          <a:solidFill>
+            <a:schemeClr val="bg1"/>
+          </a:solidFill>
+          <a:ln w="9525">
+            <a:solidFill>
+              <a:schemeClr val="accent6"/>
+            </a:solidFill>
+            <a:prstDash val="solid"/>
+          </a:ln>
+        </p:spPr>
+      </p:sp>
+      <p:sp>
+        <p:nvSpPr>
+          <p:cNvPr id="12" name="Shape 9"/>
+          <p:cNvSpPr/>
+          <p:nvPr/>
+        </p:nvSpPr>
+        <p:spPr>
+          <a:xfrm>
+            <a:off x="3017520" y="4041648"/>
+            <a:ext cx="566928" cy="566928"/>
+          </a:xfrm>
+          <a:prstGeom prst="ellipse">
+            <a:avLst/>
+          </a:prstGeom>
+          <a:solidFill>
+            <a:schemeClr val="accent2"/>
+          </a:solidFill>
+          <a:ln w="12700">
+            <a:solidFill>
+              <a:schemeClr val="accent2"/>
+            </a:solidFill>
+            <a:prstDash val="solid"/>
+          </a:ln>
+        </p:spPr>
+      </p:sp>
+      <p:pic>
+        <p:nvPicPr>
+          <p:cNvPr id="13" name="cover-icon-Sun Pharma" descr="preencoded.png">    </p:cNvPr>
+          <p:cNvPicPr>
+            <a:picLocks noChangeAspect="1"/>
+          </p:cNvPicPr>
+          <p:nvPr/>
+        </p:nvPicPr>
+        <p:blipFill>
+          <a:blip r:embed="rId2"/>
+          <a:stretch>
+            <a:fillRect/>
+          </a:stretch>
+        </p:blipFill>
+        <p:spPr>
+          <a:xfrm>
+            <a:off x="3140964" y="4165092"/>
+            <a:ext cx="320040" cy="320040"/>
+          </a:xfrm>
+          <a:prstGeom prst="rect">
+            <a:avLst/>
+          </a:prstGeom>
+        </p:spPr>
+      </p:pic>
+      <p:sp>
+        <p:nvSpPr>
+          <p:cNvPr id="14" name="Text 10"/>
+          <p:cNvSpPr txBox="1"/>
+          <p:nvPr/>
+        </p:nvSpPr>
+        <p:spPr>
+          <a:xfrm>
+            <a:off x="3730752" y="4078224"/>
+            <a:ext cx="1143000" cy="548640"/>
+          </a:xfrm>
+          <a:prstGeom prst="rect">
+            <a:avLst/>
+          </a:prstGeom>
+          <a:noFill/>
+          <a:ln/>
+        </p:spPr>
+        <p:txBody>
+          <a:bodyPr wrap="square" lIns="0" tIns="0" rIns="0" bIns="0" rtlCol="0" anchor="t"/>
+          <a:lstStyle/>
+          <a:p>
+            <a:pPr indent="0" marL="0">
+              <a:buNone/>
+            </a:pPr>
+            <a:r>
+              <a:rPr lang="en-US" sz="1000" b="1" spc="100" kern="0" dirty="0">
+                <a:solidFill>
+                  <a:schemeClr val="tx2"/>
+                </a:solidFill>
+              </a:rPr>
+              <a:t>PHARMA</a:t>
             </a:r>
             <a:endParaRPr lang="en-US" sz="1000" dirty="0"/>
           </a:p>
-        </p:txBody>
-      </p:sp>
-      <p:sp>
-        <p:nvSpPr>
-          <p:cNvPr id="8" name="Text 6"/>
+          <a:p>
+            <a:pPr indent="0" marL="0">
+              <a:buNone/>
+            </a:pPr>
+            <a:r>
+              <a:rPr lang="en-US" sz="1300" b="1" dirty="0">
+                <a:solidFill>
+                  <a:schemeClr val="tx1"/>
+                </a:solidFill>
+              </a:rPr>
+              <a:t>19% OF P</a:t>
+            </a:r>
+            <a:endParaRPr lang="en-US" sz="1000" dirty="0"/>
+          </a:p>
+        </p:txBody>
+      </p:sp>
+      <p:sp>
+        <p:nvSpPr>
+          <p:cNvPr id="15" name="Text 11"/>
           <p:cNvSpPr txBox="1"/>
           <p:nvPr/>
         </p:nvSpPr>
         <p:spPr>
           <a:xfrm>
-            <a:off x="2788920" y="4709160"/>
-            <a:ext cx="2103120" cy="457200"/>
-          </a:xfrm>
-          <a:prstGeom prst="rect">
-            <a:avLst/>
-          </a:prstGeom>
-          <a:noFill/>
-          <a:ln/>
-        </p:spPr>
-        <p:txBody>
-          <a:bodyPr wrap="square" lIns="0" tIns="0" rIns="0" bIns="0" rtlCol="0" anchor="t"/>
-          <a:lstStyle/>
-          <a:p>
-            <a:pPr indent="0" marL="0">
-              <a:buNone/>
-            </a:pPr>
-            <a:r>
-              <a:rPr lang="en-US" sz="2400" b="1" dirty="0">
+            <a:off x="3017520" y="4800600"/>
+            <a:ext cx="1828800" cy="320040"/>
+          </a:xfrm>
+          <a:prstGeom prst="rect">
+            <a:avLst/>
+          </a:prstGeom>
+          <a:noFill/>
+          <a:ln/>
+        </p:spPr>
+        <p:txBody>
+          <a:bodyPr wrap="square" lIns="0" tIns="0" rIns="0" bIns="0" rtlCol="0" anchor="t"/>
+          <a:lstStyle/>
+          <a:p>
+            <a:pPr indent="0" marL="0">
+              <a:buNone/>
+            </a:pPr>
+            <a:r>
+              <a:rPr lang="en-US" sz="1500" b="1" dirty="0">
                 <a:solidFill>
                   <a:schemeClr val="tx1"/>
                 </a:solidFill>
               </a:rPr>
-              <a:t>44 / 47</a:t>
-            </a:r>
-            <a:endParaRPr lang="en-US" sz="2400" dirty="0"/>
-          </a:p>
-        </p:txBody>
-      </p:sp>
-      <p:sp>
-        <p:nvSpPr>
-          <p:cNvPr id="9" name="Text 7"/>
+              <a:t>Sun Pharma</a:t>
+            </a:r>
+            <a:endParaRPr lang="en-US" sz="1500" dirty="0"/>
+          </a:p>
+        </p:txBody>
+      </p:sp>
+      <p:sp>
+        <p:nvSpPr>
+          <p:cNvPr id="16" name="Text 12"/>
           <p:cNvSpPr txBox="1"/>
           <p:nvPr/>
         </p:nvSpPr>
         <p:spPr>
           <a:xfrm>
-            <a:off x="2788920" y="5193792"/>
-            <a:ext cx="2011680" cy="457200"/>
-          </a:xfrm>
-          <a:prstGeom prst="rect">
-            <a:avLst/>
-          </a:prstGeom>
-          <a:noFill/>
-          <a:ln/>
-        </p:spPr>
-        <p:txBody>
-          <a:bodyPr wrap="square" lIns="0" tIns="0" rIns="0" bIns="0" rtlCol="0" anchor="t"/>
-          <a:lstStyle/>
-          <a:p>
-            <a:pPr indent="0" marL="0">
-              <a:buNone/>
-            </a:pPr>
-            <a:r>
-              <a:rPr lang="en-US" sz="1000" b="1" dirty="0">
+            <a:off x="3017520" y="5166360"/>
+            <a:ext cx="1828800" cy="274320"/>
+          </a:xfrm>
+          <a:prstGeom prst="rect">
+            <a:avLst/>
+          </a:prstGeom>
+          <a:noFill/>
+          <a:ln/>
+        </p:spPr>
+        <p:txBody>
+          <a:bodyPr wrap="square" lIns="0" tIns="0" rIns="0" bIns="0" rtlCol="0" anchor="t"/>
+          <a:lstStyle/>
+          <a:p>
+            <a:pPr indent="0" marL="0">
+              <a:buNone/>
+            </a:pPr>
+            <a:r>
+              <a:rPr lang="en-US" sz="1100" dirty="0">
                 <a:solidFill>
                   <a:schemeClr val="tx2"/>
                 </a:solidFill>
               </a:rPr>
-              <a:t>AI-EXTRACTED FIGURES WITHIN 1%</a:t>
+              <a:t>β 0.65 · CAGR 8.7%</a:t>
+            </a:r>
+            <a:endParaRPr lang="en-US" sz="1100" dirty="0"/>
+          </a:p>
+        </p:txBody>
+      </p:sp>
+      <p:sp>
+        <p:nvSpPr>
+          <p:cNvPr id="17" name="cover-ICICI Bank"/>
+          <p:cNvSpPr/>
+          <p:nvPr/>
+        </p:nvSpPr>
+        <p:spPr>
+          <a:xfrm>
+            <a:off x="5120640" y="3840480"/>
+            <a:ext cx="2103120" cy="1783080"/>
+          </a:xfrm>
+          <a:prstGeom prst="rect">
+            <a:avLst/>
+          </a:prstGeom>
+          <a:solidFill>
+            <a:schemeClr val="bg1"/>
+          </a:solidFill>
+          <a:ln w="9525">
+            <a:solidFill>
+              <a:schemeClr val="accent6"/>
+            </a:solidFill>
+            <a:prstDash val="solid"/>
+          </a:ln>
+        </p:spPr>
+      </p:sp>
+      <p:sp>
+        <p:nvSpPr>
+          <p:cNvPr id="18" name="Shape 14"/>
+          <p:cNvSpPr/>
+          <p:nvPr/>
+        </p:nvSpPr>
+        <p:spPr>
+          <a:xfrm>
+            <a:off x="5303520" y="4041648"/>
+            <a:ext cx="566928" cy="566928"/>
+          </a:xfrm>
+          <a:prstGeom prst="ellipse">
+            <a:avLst/>
+          </a:prstGeom>
+          <a:solidFill>
+            <a:schemeClr val="accent1"/>
+          </a:solidFill>
+          <a:ln w="12700">
+            <a:solidFill>
+              <a:schemeClr val="accent1"/>
+            </a:solidFill>
+            <a:prstDash val="solid"/>
+          </a:ln>
+        </p:spPr>
+      </p:sp>
+      <p:pic>
+        <p:nvPicPr>
+          <p:cNvPr id="19" name="cover-icon-ICICI Bank" descr="preencoded.png">    </p:cNvPr>
+          <p:cNvPicPr>
+            <a:picLocks noChangeAspect="1"/>
+          </p:cNvPicPr>
+          <p:nvPr/>
+        </p:nvPicPr>
+        <p:blipFill>
+          <a:blip r:embed="rId3"/>
+          <a:stretch>
+            <a:fillRect/>
+          </a:stretch>
+        </p:blipFill>
+        <p:spPr>
+          <a:xfrm>
+            <a:off x="5426964" y="4165092"/>
+            <a:ext cx="320040" cy="320040"/>
+          </a:xfrm>
+          <a:prstGeom prst="rect">
+            <a:avLst/>
+          </a:prstGeom>
+        </p:spPr>
+      </p:pic>
+      <p:sp>
+        <p:nvSpPr>
+          <p:cNvPr id="20" name="Text 15"/>
+          <p:cNvSpPr txBox="1"/>
+          <p:nvPr/>
+        </p:nvSpPr>
+        <p:spPr>
+          <a:xfrm>
+            <a:off x="6016752" y="4078224"/>
+            <a:ext cx="1143000" cy="548640"/>
+          </a:xfrm>
+          <a:prstGeom prst="rect">
+            <a:avLst/>
+          </a:prstGeom>
+          <a:noFill/>
+          <a:ln/>
+        </p:spPr>
+        <p:txBody>
+          <a:bodyPr wrap="square" lIns="0" tIns="0" rIns="0" bIns="0" rtlCol="0" anchor="t"/>
+          <a:lstStyle/>
+          <a:p>
+            <a:pPr indent="0" marL="0">
+              <a:buNone/>
+            </a:pPr>
+            <a:r>
+              <a:rPr lang="en-US" sz="1000" b="1" spc="100" kern="0" dirty="0">
+                <a:solidFill>
+                  <a:schemeClr val="tx2"/>
+                </a:solidFill>
+              </a:rPr>
+              <a:t>PRIVATE BANK</a:t>
             </a:r>
             <a:endParaRPr lang="en-US" sz="1000" dirty="0"/>
           </a:p>
-        </p:txBody>
-      </p:sp>
-      <p:sp>
-        <p:nvSpPr>
-          <p:cNvPr id="10" name="Text 8"/>
+          <a:p>
+            <a:pPr indent="0" marL="0">
+              <a:buNone/>
+            </a:pPr>
+            <a:r>
+              <a:rPr lang="en-US" sz="1300" b="1" dirty="0">
+                <a:solidFill>
+                  <a:schemeClr val="tx1"/>
+                </a:solidFill>
+              </a:rPr>
+              <a:t>50% OF P</a:t>
+            </a:r>
+            <a:endParaRPr lang="en-US" sz="1000" dirty="0"/>
+          </a:p>
+        </p:txBody>
+      </p:sp>
+      <p:sp>
+        <p:nvSpPr>
+          <p:cNvPr id="21" name="Text 16"/>
           <p:cNvSpPr txBox="1"/>
           <p:nvPr/>
         </p:nvSpPr>
         <p:spPr>
           <a:xfrm>
-            <a:off x="5029200" y="4709160"/>
-            <a:ext cx="2103120" cy="457200"/>
-          </a:xfrm>
-          <a:prstGeom prst="rect">
-            <a:avLst/>
-          </a:prstGeom>
-          <a:noFill/>
-          <a:ln/>
-        </p:spPr>
-        <p:txBody>
-          <a:bodyPr wrap="square" lIns="0" tIns="0" rIns="0" bIns="0" rtlCol="0" anchor="t"/>
-          <a:lstStyle/>
-          <a:p>
-            <a:pPr indent="0" marL="0">
-              <a:buNone/>
-            </a:pPr>
-            <a:r>
-              <a:rPr lang="en-US" sz="2400" b="1" dirty="0">
+            <a:off x="5303520" y="4800600"/>
+            <a:ext cx="1828800" cy="320040"/>
+          </a:xfrm>
+          <a:prstGeom prst="rect">
+            <a:avLst/>
+          </a:prstGeom>
+          <a:noFill/>
+          <a:ln/>
+        </p:spPr>
+        <p:txBody>
+          <a:bodyPr wrap="square" lIns="0" tIns="0" rIns="0" bIns="0" rtlCol="0" anchor="t"/>
+          <a:lstStyle/>
+          <a:p>
+            <a:pPr indent="0" marL="0">
+              <a:buNone/>
+            </a:pPr>
+            <a:r>
+              <a:rPr lang="en-US" sz="1500" b="1" dirty="0">
                 <a:solidFill>
                   <a:schemeClr val="tx1"/>
                 </a:solidFill>
               </a:rPr>
-              <a:t>0 of 8</a:t>
-            </a:r>
-            <a:endParaRPr lang="en-US" sz="2400" dirty="0"/>
-          </a:p>
-        </p:txBody>
-      </p:sp>
-      <p:sp>
-        <p:nvSpPr>
-          <p:cNvPr id="11" name="Text 9"/>
+              <a:t>ICICI Bank</a:t>
+            </a:r>
+            <a:endParaRPr lang="en-US" sz="1500" dirty="0"/>
+          </a:p>
+        </p:txBody>
+      </p:sp>
+      <p:sp>
+        <p:nvSpPr>
+          <p:cNvPr id="22" name="Text 17"/>
           <p:cNvSpPr txBox="1"/>
           <p:nvPr/>
         </p:nvSpPr>
         <p:spPr>
           <a:xfrm>
-            <a:off x="5029200" y="5193792"/>
-            <a:ext cx="2011680" cy="457200"/>
-          </a:xfrm>
-          <a:prstGeom prst="rect">
-            <a:avLst/>
-          </a:prstGeom>
-          <a:noFill/>
-          <a:ln/>
-        </p:spPr>
-        <p:txBody>
-          <a:bodyPr wrap="square" lIns="0" tIns="0" rIns="0" bIns="0" rtlCol="0" anchor="t"/>
-          <a:lstStyle/>
-          <a:p>
-            <a:pPr indent="0" marL="0">
-              <a:buNone/>
-            </a:pPr>
-            <a:r>
-              <a:rPr lang="en-US" sz="1000" b="1" dirty="0">
+            <a:off x="5303520" y="5166360"/>
+            <a:ext cx="1828800" cy="274320"/>
+          </a:xfrm>
+          <a:prstGeom prst="rect">
+            <a:avLst/>
+          </a:prstGeom>
+          <a:noFill/>
+          <a:ln/>
+        </p:spPr>
+        <p:txBody>
+          <a:bodyPr wrap="square" lIns="0" tIns="0" rIns="0" bIns="0" rtlCol="0" anchor="t"/>
+          <a:lstStyle/>
+          <a:p>
+            <a:pPr indent="0" marL="0">
+              <a:buNone/>
+            </a:pPr>
+            <a:r>
+              <a:rPr lang="en-US" sz="1100" dirty="0">
                 <a:solidFill>
                   <a:schemeClr val="tx2"/>
                 </a:solidFill>
               </a:rPr>
-              <a:t>TRADING RULES THAT BEAT BUY-AND-HOLD</a:t>
+              <a:t>β 1.29 · CAGR 19.1%</a:t>
+            </a:r>
+            <a:endParaRPr lang="en-US" sz="1100" dirty="0"/>
+          </a:p>
+        </p:txBody>
+      </p:sp>
+      <p:sp>
+        <p:nvSpPr>
+          <p:cNvPr id="23" name="Text 18"/>
+          <p:cNvSpPr txBox="1"/>
+          <p:nvPr/>
+        </p:nvSpPr>
+        <p:spPr>
+          <a:xfrm>
+            <a:off x="548640" y="6172200"/>
+            <a:ext cx="5669280" cy="274320"/>
+          </a:xfrm>
+          <a:prstGeom prst="rect">
+            <a:avLst/>
+          </a:prstGeom>
+          <a:noFill/>
+          <a:ln/>
+        </p:spPr>
+        <p:txBody>
+          <a:bodyPr wrap="square" lIns="0" tIns="0" rIns="0" bIns="0" rtlCol="0" anchor="t"/>
+          <a:lstStyle/>
+          <a:p>
+            <a:pPr indent="0" marL="0">
+              <a:buNone/>
+            </a:pPr>
+            <a:r>
+              <a:rPr lang="en-US" sz="1000" b="1" spc="150" kern="0" dirty="0">
+                <a:solidFill>
+                  <a:schemeClr val="tx2"/>
+                </a:solidFill>
+              </a:rPr>
+              <a:t>GROUP PROJECT · DATA AS OF 13 OCT 2026</a:t>
             </a:r>
             <a:endParaRPr lang="en-US" sz="1000" dirty="0"/>
           </a:p>
@@ -4492,14 +5113,14 @@
       </p:sp>
       <p:sp>
         <p:nvSpPr>
-          <p:cNvPr id="12" name="Text 10"/>
+          <p:cNvPr id="24" name="Text 19"/>
           <p:cNvSpPr txBox="1"/>
           <p:nvPr/>
         </p:nvSpPr>
         <p:spPr>
           <a:xfrm>
-            <a:off x="548640" y="6172200"/>
-            <a:ext cx="6766560" cy="274320"/>
+            <a:off x="8229600" y="1097280"/>
+            <a:ext cx="3474720" cy="274320"/>
           </a:xfrm>
           <a:prstGeom prst="rect">
             <a:avLst/>
@@ -4517,46 +5138,101 @@
             <a:r>
               <a:rPr lang="en-US" sz="1000" b="1" spc="150" kern="0" dirty="0">
                 <a:solidFill>
-                  <a:schemeClr val="tx1"/>
-                </a:solidFill>
-              </a:rPr>
-              <a:t>TAPMI · BBA(H) SEMESTER V · GROUP PROJECT</a:t>
+                  <a:schemeClr val="accent2"/>
+                </a:solidFill>
+              </a:rPr>
+              <a:t>THE PORTFOLIO WE BUILT</a:t>
             </a:r>
             <a:endParaRPr lang="en-US" sz="1000" dirty="0"/>
           </a:p>
         </p:txBody>
       </p:sp>
-      <p:sp>
-        <p:nvSpPr>
-          <p:cNvPr id="13" name="Text 11"/>
+      <p:graphicFrame>
+        <p:nvGraphicFramePr>
+          <p:cNvPr id="25" name="cover-weights" descr=""/>
+          <p:cNvGraphicFramePr/>
+          <p:nvPr/>
+        </p:nvGraphicFramePr>
+        <p:xfrm>
+          <a:off x="8595360" y="1371600"/>
+          <a:ext cx="2697480" cy="2697480"/>
+        </p:xfrm>
+        <a:graphic xmlns:a="http://schemas.openxmlformats.org/drawingml/2006/main">
+          <a:graphicData uri="http://schemas.openxmlformats.org/drawingml/2006/chart">
+            <c:chart xmlns:c="http://schemas.openxmlformats.org/drawingml/2006/chart" r:id="rId4"/>
+          </a:graphicData>
+        </a:graphic>
+      </p:graphicFrame>
+      <p:sp>
+        <p:nvSpPr>
+          <p:cNvPr id="26" name="Text 20"/>
           <p:cNvSpPr txBox="1"/>
           <p:nvPr/>
         </p:nvSpPr>
         <p:spPr>
           <a:xfrm>
-            <a:off x="8229600" y="1234440"/>
-            <a:ext cx="3383280" cy="274320"/>
-          </a:xfrm>
-          <a:prstGeom prst="rect">
-            <a:avLst/>
-          </a:prstGeom>
-          <a:noFill/>
-          <a:ln/>
-        </p:spPr>
-        <p:txBody>
-          <a:bodyPr wrap="square" lIns="0" tIns="0" rIns="0" bIns="0" rtlCol="0" anchor="t"/>
-          <a:lstStyle/>
-          <a:p>
-            <a:pPr indent="0" marL="0">
-              <a:buNone/>
-            </a:pPr>
-            <a:r>
-              <a:rPr lang="en-US" sz="1000" b="1" spc="150" kern="0" dirty="0">
-                <a:solidFill>
-                  <a:schemeClr val="accent2"/>
-                </a:solidFill>
-              </a:rPr>
-              <a:t>OUR ANSWER IN THREE MOVES</a:t>
+            <a:off x="9395460" y="2331720"/>
+            <a:ext cx="1097280" cy="502920"/>
+          </a:xfrm>
+          <a:prstGeom prst="rect">
+            <a:avLst/>
+          </a:prstGeom>
+          <a:noFill/>
+          <a:ln/>
+        </p:spPr>
+        <p:txBody>
+          <a:bodyPr wrap="square" lIns="0" tIns="0" rIns="0" bIns="0" rtlCol="0" anchor="t"/>
+          <a:lstStyle/>
+          <a:p>
+            <a:pPr algn="ctr" indent="0" marL="0">
+              <a:buNone/>
+            </a:pPr>
+            <a:r>
+              <a:rPr lang="en-US" sz="3000" b="1" dirty="0">
+                <a:solidFill>
+                  <a:schemeClr val="bg1"/>
+                </a:solidFill>
+                <a:latin typeface="Century Gothic" pitchFamily="34" charset="0"/>
+                <a:ea typeface="Century Gothic" pitchFamily="34" charset="-122"/>
+                <a:cs typeface="Century Gothic" pitchFamily="34" charset="-120"/>
+              </a:rPr>
+              <a:t>P</a:t>
+            </a:r>
+            <a:endParaRPr lang="en-US" sz="3000" dirty="0"/>
+          </a:p>
+        </p:txBody>
+      </p:sp>
+      <p:sp>
+        <p:nvSpPr>
+          <p:cNvPr id="27" name="Text 21"/>
+          <p:cNvSpPr txBox="1"/>
+          <p:nvPr/>
+        </p:nvSpPr>
+        <p:spPr>
+          <a:xfrm>
+            <a:off x="9212580" y="2834640"/>
+            <a:ext cx="1463040" cy="274320"/>
+          </a:xfrm>
+          <a:prstGeom prst="rect">
+            <a:avLst/>
+          </a:prstGeom>
+          <a:noFill/>
+          <a:ln/>
+        </p:spPr>
+        <p:txBody>
+          <a:bodyPr wrap="square" lIns="0" tIns="0" rIns="0" bIns="0" rtlCol="0" anchor="t"/>
+          <a:lstStyle/>
+          <a:p>
+            <a:pPr algn="ctr" indent="0" marL="0">
+              <a:buNone/>
+            </a:pPr>
+            <a:r>
+              <a:rPr lang="en-US" sz="1000" b="1" spc="100" kern="0" dirty="0">
+                <a:solidFill>
+                  <a:schemeClr val="accent6"/>
+                </a:solidFill>
+              </a:rPr>
+              <a:t>SHARPE 0.34</a:t>
             </a:r>
             <a:endParaRPr lang="en-US" sz="1000" dirty="0"/>
           </a:p>
@@ -4564,122 +5240,14 @@
       </p:sp>
       <p:sp>
         <p:nvSpPr>
-          <p:cNvPr id="14" name="Text 12"/>
-          <p:cNvSpPr txBox="1"/>
-          <p:nvPr/>
-        </p:nvSpPr>
-        <p:spPr>
-          <a:xfrm>
-            <a:off x="8229600" y="1737360"/>
-            <a:ext cx="457200" cy="274320"/>
-          </a:xfrm>
-          <a:prstGeom prst="rect">
-            <a:avLst/>
-          </a:prstGeom>
-          <a:noFill/>
-          <a:ln/>
-        </p:spPr>
-        <p:txBody>
-          <a:bodyPr wrap="square" lIns="0" tIns="0" rIns="0" bIns="0" rtlCol="0" anchor="t"/>
-          <a:lstStyle/>
-          <a:p>
-            <a:pPr indent="0" marL="0">
-              <a:buNone/>
-            </a:pPr>
-            <a:r>
-              <a:rPr lang="en-US" sz="1100" b="1" dirty="0">
-                <a:solidFill>
-                  <a:schemeClr val="accent2"/>
-                </a:solidFill>
-              </a:rPr>
-              <a:t>01</a:t>
-            </a:r>
-            <a:endParaRPr lang="en-US" sz="1100" dirty="0"/>
-          </a:p>
-        </p:txBody>
-      </p:sp>
-      <p:sp>
-        <p:nvSpPr>
-          <p:cNvPr id="15" name="Text 13"/>
-          <p:cNvSpPr txBox="1"/>
-          <p:nvPr/>
-        </p:nvSpPr>
-        <p:spPr>
-          <a:xfrm>
-            <a:off x="8732520" y="1691640"/>
-            <a:ext cx="2926080" cy="365760"/>
-          </a:xfrm>
-          <a:prstGeom prst="rect">
-            <a:avLst/>
-          </a:prstGeom>
-          <a:noFill/>
-          <a:ln/>
-        </p:spPr>
-        <p:txBody>
-          <a:bodyPr wrap="square" lIns="0" tIns="0" rIns="0" bIns="0" rtlCol="0" anchor="t"/>
-          <a:lstStyle/>
-          <a:p>
-            <a:pPr indent="0" marL="0">
-              <a:buNone/>
-            </a:pPr>
-            <a:r>
-              <a:rPr lang="en-US" sz="2000" b="1" dirty="0">
-                <a:solidFill>
-                  <a:schemeClr val="bg1"/>
-                </a:solidFill>
-              </a:rPr>
-              <a:t>PICK</a:t>
-            </a:r>
-            <a:endParaRPr lang="en-US" sz="2000" dirty="0"/>
-          </a:p>
-        </p:txBody>
-      </p:sp>
-      <p:sp>
-        <p:nvSpPr>
-          <p:cNvPr id="16" name="Text 14"/>
-          <p:cNvSpPr txBox="1"/>
-          <p:nvPr/>
-        </p:nvSpPr>
-        <p:spPr>
-          <a:xfrm>
-            <a:off x="8732520" y="2103120"/>
-            <a:ext cx="2926080" cy="502920"/>
-          </a:xfrm>
-          <a:prstGeom prst="rect">
-            <a:avLst/>
-          </a:prstGeom>
-          <a:noFill/>
-          <a:ln/>
-        </p:spPr>
-        <p:txBody>
-          <a:bodyPr wrap="square" lIns="0" tIns="0" rIns="0" bIns="0" rtlCol="0" anchor="t"/>
-          <a:lstStyle/>
-          <a:p>
-            <a:pPr indent="0" marL="0">
-              <a:buNone/>
-            </a:pPr>
-            <a:r>
-              <a:rPr lang="en-US" sz="1200" dirty="0">
-                <a:solidFill>
-                  <a:schemeClr val="accent6"/>
-                </a:solidFill>
-              </a:rPr>
-              <a:t>Three sectors, three macro drivers, correlations of 0.16–0.24</a:t>
-            </a:r>
-            <a:endParaRPr lang="en-US" sz="1200" dirty="0"/>
-          </a:p>
-        </p:txBody>
-      </p:sp>
-      <p:sp>
-        <p:nvSpPr>
-          <p:cNvPr id="17" name="Shape 15"/>
+          <p:cNvPr id="28" name="Shape 22"/>
           <p:cNvSpPr/>
           <p:nvPr/>
         </p:nvSpPr>
         <p:spPr>
           <a:xfrm>
-            <a:off x="8229600" y="2679192"/>
-            <a:ext cx="3410712" cy="0"/>
+            <a:off x="8229600" y="4206240"/>
+            <a:ext cx="3520440" cy="0"/>
           </a:xfrm>
           <a:prstGeom prst="line">
             <a:avLst/>
@@ -4695,122 +5263,89 @@
       </p:sp>
       <p:sp>
         <p:nvSpPr>
-          <p:cNvPr id="18" name="Text 16"/>
+          <p:cNvPr id="29" name="Text 23"/>
           <p:cNvSpPr txBox="1"/>
           <p:nvPr/>
         </p:nvSpPr>
         <p:spPr>
           <a:xfrm>
-            <a:off x="8229600" y="2852928"/>
-            <a:ext cx="457200" cy="274320"/>
-          </a:xfrm>
-          <a:prstGeom prst="rect">
-            <a:avLst/>
-          </a:prstGeom>
-          <a:noFill/>
-          <a:ln/>
-        </p:spPr>
-        <p:txBody>
-          <a:bodyPr wrap="square" lIns="0" tIns="0" rIns="0" bIns="0" rtlCol="0" anchor="t"/>
-          <a:lstStyle/>
-          <a:p>
-            <a:pPr indent="0" marL="0">
-              <a:buNone/>
-            </a:pPr>
-            <a:r>
-              <a:rPr lang="en-US" sz="1100" b="1" dirty="0">
-                <a:solidFill>
-                  <a:schemeClr val="accent2"/>
-                </a:solidFill>
-              </a:rPr>
-              <a:t>02</a:t>
-            </a:r>
-            <a:endParaRPr lang="en-US" sz="1100" dirty="0"/>
-          </a:p>
-        </p:txBody>
-      </p:sp>
-      <p:sp>
-        <p:nvSpPr>
-          <p:cNvPr id="19" name="Text 17"/>
+            <a:off x="8229600" y="4297680"/>
+            <a:ext cx="1783080" cy="457200"/>
+          </a:xfrm>
+          <a:prstGeom prst="rect">
+            <a:avLst/>
+          </a:prstGeom>
+          <a:noFill/>
+          <a:ln/>
+        </p:spPr>
+        <p:txBody>
+          <a:bodyPr wrap="square" lIns="0" tIns="0" rIns="0" bIns="0" rtlCol="0" anchor="ctr"/>
+          <a:lstStyle/>
+          <a:p>
+            <a:pPr indent="0" marL="0">
+              <a:buNone/>
+            </a:pPr>
+            <a:r>
+              <a:rPr lang="en-US" sz="2000" b="1" dirty="0">
+                <a:solidFill>
+                  <a:schemeClr val="bg1"/>
+                </a:solidFill>
+                <a:latin typeface="Century Gothic" pitchFamily="34" charset="0"/>
+                <a:ea typeface="Century Gothic" pitchFamily="34" charset="-122"/>
+                <a:cs typeface="Century Gothic" pitchFamily="34" charset="-120"/>
+              </a:rPr>
+              <a:t>₹64.8 lakh</a:t>
+            </a:r>
+            <a:endParaRPr lang="en-US" sz="2000" dirty="0"/>
+          </a:p>
+        </p:txBody>
+      </p:sp>
+      <p:sp>
+        <p:nvSpPr>
+          <p:cNvPr id="30" name="Text 24"/>
           <p:cNvSpPr txBox="1"/>
           <p:nvPr/>
         </p:nvSpPr>
         <p:spPr>
           <a:xfrm>
-            <a:off x="8732520" y="2807208"/>
-            <a:ext cx="2926080" cy="365760"/>
-          </a:xfrm>
-          <a:prstGeom prst="rect">
-            <a:avLst/>
-          </a:prstGeom>
-          <a:noFill/>
-          <a:ln/>
-        </p:spPr>
-        <p:txBody>
-          <a:bodyPr wrap="square" lIns="0" tIns="0" rIns="0" bIns="0" rtlCol="0" anchor="t"/>
-          <a:lstStyle/>
-          <a:p>
-            <a:pPr indent="0" marL="0">
-              <a:buNone/>
-            </a:pPr>
-            <a:r>
-              <a:rPr lang="en-US" sz="2000" b="1" dirty="0">
-                <a:solidFill>
-                  <a:schemeClr val="bg1"/>
-                </a:solidFill>
-              </a:rPr>
-              <a:t>PRICE</a:t>
-            </a:r>
-            <a:endParaRPr lang="en-US" sz="2000" dirty="0"/>
-          </a:p>
-        </p:txBody>
-      </p:sp>
-      <p:sp>
-        <p:nvSpPr>
-          <p:cNvPr id="20" name="Text 18"/>
-          <p:cNvSpPr txBox="1"/>
-          <p:nvPr/>
-        </p:nvSpPr>
-        <p:spPr>
-          <a:xfrm>
-            <a:off x="8732520" y="3218688"/>
-            <a:ext cx="2926080" cy="502920"/>
-          </a:xfrm>
-          <a:prstGeom prst="rect">
-            <a:avLst/>
-          </a:prstGeom>
-          <a:noFill/>
-          <a:ln/>
-        </p:spPr>
-        <p:txBody>
-          <a:bodyPr wrap="square" lIns="0" tIns="0" rIns="0" bIns="0" rtlCol="0" anchor="t"/>
-          <a:lstStyle/>
-          <a:p>
-            <a:pPr indent="0" marL="0">
-              <a:buNone/>
-            </a:pPr>
-            <a:r>
-              <a:rPr lang="en-US" sz="1200" dirty="0">
+            <a:off x="10058400" y="4297680"/>
+            <a:ext cx="1691640" cy="457200"/>
+          </a:xfrm>
+          <a:prstGeom prst="rect">
+            <a:avLst/>
+          </a:prstGeom>
+          <a:noFill/>
+          <a:ln/>
+        </p:spPr>
+        <p:txBody>
+          <a:bodyPr wrap="square" lIns="0" tIns="0" rIns="0" bIns="0" rtlCol="0" anchor="ctr"/>
+          <a:lstStyle/>
+          <a:p>
+            <a:pPr indent="0" marL="0">
+              <a:buNone/>
+            </a:pPr>
+            <a:r>
+              <a:rPr lang="en-US" sz="900" b="1" dirty="0">
                 <a:solidFill>
                   <a:schemeClr val="accent6"/>
                 </a:solidFill>
               </a:rPr>
-              <a:t>All three trade above our blended value, so we buy slowly, through a SIP</a:t>
-            </a:r>
-            <a:endParaRPr lang="en-US" sz="1200" dirty="0"/>
-          </a:p>
-        </p:txBody>
-      </p:sp>
-      <p:sp>
-        <p:nvSpPr>
-          <p:cNvPr id="21" name="Shape 19"/>
+              <a:t>MEDIAN 15-YEAR CORPUS FROM A ₹10,000 MONTHLY SIP</a:t>
+            </a:r>
+            <a:endParaRPr lang="en-US" sz="900" dirty="0"/>
+          </a:p>
+        </p:txBody>
+      </p:sp>
+      <p:sp>
+        <p:nvSpPr>
+          <p:cNvPr id="31" name="Shape 25"/>
           <p:cNvSpPr/>
           <p:nvPr/>
         </p:nvSpPr>
         <p:spPr>
           <a:xfrm>
-            <a:off x="8229600" y="3794760"/>
-            <a:ext cx="3410712" cy="0"/>
+            <a:off x="8229600" y="4919472"/>
+            <a:ext cx="3520440" cy="0"/>
           </a:xfrm>
           <a:prstGeom prst="line">
             <a:avLst/>
@@ -4826,122 +5361,89 @@
       </p:sp>
       <p:sp>
         <p:nvSpPr>
-          <p:cNvPr id="22" name="Text 20"/>
+          <p:cNvPr id="32" name="Text 26"/>
           <p:cNvSpPr txBox="1"/>
           <p:nvPr/>
         </p:nvSpPr>
         <p:spPr>
           <a:xfrm>
-            <a:off x="8229600" y="3968496"/>
-            <a:ext cx="457200" cy="274320"/>
-          </a:xfrm>
-          <a:prstGeom prst="rect">
-            <a:avLst/>
-          </a:prstGeom>
-          <a:noFill/>
-          <a:ln/>
-        </p:spPr>
-        <p:txBody>
-          <a:bodyPr wrap="square" lIns="0" tIns="0" rIns="0" bIns="0" rtlCol="0" anchor="t"/>
-          <a:lstStyle/>
-          <a:p>
-            <a:pPr indent="0" marL="0">
-              <a:buNone/>
-            </a:pPr>
-            <a:r>
-              <a:rPr lang="en-US" sz="1100" b="1" dirty="0">
-                <a:solidFill>
-                  <a:schemeClr val="accent2"/>
-                </a:solidFill>
-              </a:rPr>
-              <a:t>03</a:t>
-            </a:r>
-            <a:endParaRPr lang="en-US" sz="1100" dirty="0"/>
-          </a:p>
-        </p:txBody>
-      </p:sp>
-      <p:sp>
-        <p:nvSpPr>
-          <p:cNvPr id="23" name="Text 21"/>
+            <a:off x="8229600" y="5010912"/>
+            <a:ext cx="1783080" cy="457200"/>
+          </a:xfrm>
+          <a:prstGeom prst="rect">
+            <a:avLst/>
+          </a:prstGeom>
+          <a:noFill/>
+          <a:ln/>
+        </p:spPr>
+        <p:txBody>
+          <a:bodyPr wrap="square" lIns="0" tIns="0" rIns="0" bIns="0" rtlCol="0" anchor="ctr"/>
+          <a:lstStyle/>
+          <a:p>
+            <a:pPr indent="0" marL="0">
+              <a:buNone/>
+            </a:pPr>
+            <a:r>
+              <a:rPr lang="en-US" sz="2000" b="1" dirty="0">
+                <a:solidFill>
+                  <a:schemeClr val="bg1"/>
+                </a:solidFill>
+                <a:latin typeface="Century Gothic" pitchFamily="34" charset="0"/>
+                <a:ea typeface="Century Gothic" pitchFamily="34" charset="-122"/>
+                <a:cs typeface="Century Gothic" pitchFamily="34" charset="-120"/>
+              </a:rPr>
+              <a:t>44 / 47</a:t>
+            </a:r>
+            <a:endParaRPr lang="en-US" sz="2000" dirty="0"/>
+          </a:p>
+        </p:txBody>
+      </p:sp>
+      <p:sp>
+        <p:nvSpPr>
+          <p:cNvPr id="33" name="Text 27"/>
           <p:cNvSpPr txBox="1"/>
           <p:nvPr/>
         </p:nvSpPr>
         <p:spPr>
           <a:xfrm>
-            <a:off x="8732520" y="3922776"/>
-            <a:ext cx="2926080" cy="365760"/>
-          </a:xfrm>
-          <a:prstGeom prst="rect">
-            <a:avLst/>
-          </a:prstGeom>
-          <a:noFill/>
-          <a:ln/>
-        </p:spPr>
-        <p:txBody>
-          <a:bodyPr wrap="square" lIns="0" tIns="0" rIns="0" bIns="0" rtlCol="0" anchor="t"/>
-          <a:lstStyle/>
-          <a:p>
-            <a:pPr indent="0" marL="0">
-              <a:buNone/>
-            </a:pPr>
-            <a:r>
-              <a:rPr lang="en-US" sz="2000" b="1" dirty="0">
-                <a:solidFill>
-                  <a:schemeClr val="bg1"/>
-                </a:solidFill>
-              </a:rPr>
-              <a:t>PORTFOLIO</a:t>
-            </a:r>
-            <a:endParaRPr lang="en-US" sz="2000" dirty="0"/>
-          </a:p>
-        </p:txBody>
-      </p:sp>
-      <p:sp>
-        <p:nvSpPr>
-          <p:cNvPr id="24" name="Text 22"/>
-          <p:cNvSpPr txBox="1"/>
-          <p:nvPr/>
-        </p:nvSpPr>
-        <p:spPr>
-          <a:xfrm>
-            <a:off x="8732520" y="4334256"/>
-            <a:ext cx="2926080" cy="502920"/>
-          </a:xfrm>
-          <a:prstGeom prst="rect">
-            <a:avLst/>
-          </a:prstGeom>
-          <a:noFill/>
-          <a:ln/>
-        </p:spPr>
-        <p:txBody>
-          <a:bodyPr wrap="square" lIns="0" tIns="0" rIns="0" bIns="0" rtlCol="0" anchor="t"/>
-          <a:lstStyle/>
-          <a:p>
-            <a:pPr indent="0" marL="0">
-              <a:buNone/>
-            </a:pPr>
-            <a:r>
-              <a:rPr lang="en-US" sz="1200" dirty="0">
+            <a:off x="10058400" y="5010912"/>
+            <a:ext cx="1691640" cy="457200"/>
+          </a:xfrm>
+          <a:prstGeom prst="rect">
+            <a:avLst/>
+          </a:prstGeom>
+          <a:noFill/>
+          <a:ln/>
+        </p:spPr>
+        <p:txBody>
+          <a:bodyPr wrap="square" lIns="0" tIns="0" rIns="0" bIns="0" rtlCol="0" anchor="ctr"/>
+          <a:lstStyle/>
+          <a:p>
+            <a:pPr indent="0" marL="0">
+              <a:buNone/>
+            </a:pPr>
+            <a:r>
+              <a:rPr lang="en-US" sz="900" b="1" dirty="0">
                 <a:solidFill>
                   <a:schemeClr val="accent6"/>
                 </a:solidFill>
               </a:rPr>
-              <a:t>31 · 19 · 50 satellite around a Nifty 50 index core</a:t>
-            </a:r>
-            <a:endParaRPr lang="en-US" sz="1200" dirty="0"/>
-          </a:p>
-        </p:txBody>
-      </p:sp>
-      <p:sp>
-        <p:nvSpPr>
-          <p:cNvPr id="25" name="Shape 23"/>
+              <a:t>AI-EXTRACTED FIGURES WITHIN 1% OF YAHOO AND SCREENER</a:t>
+            </a:r>
+            <a:endParaRPr lang="en-US" sz="900" dirty="0"/>
+          </a:p>
+        </p:txBody>
+      </p:sp>
+      <p:sp>
+        <p:nvSpPr>
+          <p:cNvPr id="34" name="Shape 28"/>
           <p:cNvSpPr/>
           <p:nvPr/>
         </p:nvSpPr>
         <p:spPr>
           <a:xfrm>
-            <a:off x="8229600" y="4910328"/>
-            <a:ext cx="3410712" cy="0"/>
+            <a:off x="8229600" y="5632704"/>
+            <a:ext cx="3520440" cy="0"/>
           </a:xfrm>
           <a:prstGeom prst="line">
             <a:avLst/>
@@ -4954,6 +5456,81 @@
             <a:prstDash val="solid"/>
           </a:ln>
         </p:spPr>
+      </p:sp>
+      <p:sp>
+        <p:nvSpPr>
+          <p:cNvPr id="35" name="Text 29"/>
+          <p:cNvSpPr txBox="1"/>
+          <p:nvPr/>
+        </p:nvSpPr>
+        <p:spPr>
+          <a:xfrm>
+            <a:off x="8229600" y="5724144"/>
+            <a:ext cx="1783080" cy="457200"/>
+          </a:xfrm>
+          <a:prstGeom prst="rect">
+            <a:avLst/>
+          </a:prstGeom>
+          <a:noFill/>
+          <a:ln/>
+        </p:spPr>
+        <p:txBody>
+          <a:bodyPr wrap="square" lIns="0" tIns="0" rIns="0" bIns="0" rtlCol="0" anchor="ctr"/>
+          <a:lstStyle/>
+          <a:p>
+            <a:pPr indent="0" marL="0">
+              <a:buNone/>
+            </a:pPr>
+            <a:r>
+              <a:rPr lang="en-US" sz="2000" b="1" dirty="0">
+                <a:solidFill>
+                  <a:schemeClr val="bg1"/>
+                </a:solidFill>
+                <a:latin typeface="Century Gothic" pitchFamily="34" charset="0"/>
+                <a:ea typeface="Century Gothic" pitchFamily="34" charset="-122"/>
+                <a:cs typeface="Century Gothic" pitchFamily="34" charset="-120"/>
+              </a:rPr>
+              <a:t>0 of 8</a:t>
+            </a:r>
+            <a:endParaRPr lang="en-US" sz="2000" dirty="0"/>
+          </a:p>
+        </p:txBody>
+      </p:sp>
+      <p:sp>
+        <p:nvSpPr>
+          <p:cNvPr id="36" name="Text 30"/>
+          <p:cNvSpPr txBox="1"/>
+          <p:nvPr/>
+        </p:nvSpPr>
+        <p:spPr>
+          <a:xfrm>
+            <a:off x="10058400" y="5724144"/>
+            <a:ext cx="1691640" cy="457200"/>
+          </a:xfrm>
+          <a:prstGeom prst="rect">
+            <a:avLst/>
+          </a:prstGeom>
+          <a:noFill/>
+          <a:ln/>
+        </p:spPr>
+        <p:txBody>
+          <a:bodyPr wrap="square" lIns="0" tIns="0" rIns="0" bIns="0" rtlCol="0" anchor="ctr"/>
+          <a:lstStyle/>
+          <a:p>
+            <a:pPr indent="0" marL="0">
+              <a:buNone/>
+            </a:pPr>
+            <a:r>
+              <a:rPr lang="en-US" sz="900" b="1" dirty="0">
+                <a:solidFill>
+                  <a:schemeClr val="accent6"/>
+                </a:solidFill>
+              </a:rPr>
+              <a:t>TRADING RULES THAT BEAT BUY-AND-HOLD AFTER COSTS</a:t>
+            </a:r>
+            <a:endParaRPr lang="en-US" sz="900" dirty="0"/>
+          </a:p>
+        </p:txBody>
       </p:sp>
     </p:spTree>
   </p:cSld>
@@ -7422,6 +7999,9 @@
                 <a:solidFill>
                   <a:schemeClr val="accent1"/>
                 </a:solidFill>
+                <a:latin typeface="Century Gothic" pitchFamily="34" charset="0"/>
+                <a:ea typeface="Century Gothic" pitchFamily="34" charset="-122"/>
+                <a:cs typeface="Century Gothic" pitchFamily="34" charset="-120"/>
               </a:rPr>
               <a:t>32%</a:t>
             </a:r>
@@ -7508,6 +8088,9 @@
                 <a:solidFill>
                   <a:schemeClr val="accent1"/>
                 </a:solidFill>
+                <a:latin typeface="Century Gothic" pitchFamily="34" charset="0"/>
+                <a:ea typeface="Century Gothic" pitchFamily="34" charset="-122"/>
+                <a:cs typeface="Century Gothic" pitchFamily="34" charset="-120"/>
               </a:rPr>
               <a:t>11%</a:t>
             </a:r>
@@ -7594,6 +8177,9 @@
                 <a:solidFill>
                   <a:schemeClr val="accent1"/>
                 </a:solidFill>
+                <a:latin typeface="Century Gothic" pitchFamily="34" charset="0"/>
+                <a:ea typeface="Century Gothic" pitchFamily="34" charset="-122"/>
+                <a:cs typeface="Century Gothic" pitchFamily="34" charset="-120"/>
               </a:rPr>
               <a:t>57%</a:t>
             </a:r>
@@ -9872,6 +10458,9 @@
                 <a:solidFill>
                   <a:schemeClr val="accent1"/>
                 </a:solidFill>
+                <a:latin typeface="Century Gothic" pitchFamily="34" charset="0"/>
+                <a:ea typeface="Century Gothic" pitchFamily="34" charset="-122"/>
+                <a:cs typeface="Century Gothic" pitchFamily="34" charset="-120"/>
               </a:rPr>
               <a:t>7.8%</a:t>
             </a:r>
@@ -9969,6 +10558,9 @@
                 <a:solidFill>
                   <a:schemeClr val="accent1"/>
                 </a:solidFill>
+                <a:latin typeface="Century Gothic" pitchFamily="34" charset="0"/>
+                <a:ea typeface="Century Gothic" pitchFamily="34" charset="-122"/>
+                <a:cs typeface="Century Gothic" pitchFamily="34" charset="-120"/>
               </a:rPr>
               <a:t>+11.9%</a:t>
             </a:r>
@@ -10066,6 +10658,9 @@
                 <a:solidFill>
                   <a:schemeClr val="accent1"/>
                 </a:solidFill>
+                <a:latin typeface="Century Gothic" pitchFamily="34" charset="0"/>
+                <a:ea typeface="Century Gothic" pitchFamily="34" charset="-122"/>
+                <a:cs typeface="Century Gothic" pitchFamily="34" charset="-120"/>
               </a:rPr>
               <a:t>5.25%</a:t>
             </a:r>
@@ -10163,6 +10758,9 @@
                 <a:solidFill>
                   <a:schemeClr val="accent1"/>
                 </a:solidFill>
+                <a:latin typeface="Century Gothic" pitchFamily="34" charset="0"/>
+                <a:ea typeface="Century Gothic" pitchFamily="34" charset="-122"/>
+                <a:cs typeface="Century Gothic" pitchFamily="34" charset="-120"/>
               </a:rPr>
               <a:t>5.52%</a:t>
             </a:r>
@@ -10961,6 +11559,9 @@
                 <a:solidFill>
                   <a:schemeClr val="bg1"/>
                 </a:solidFill>
+                <a:latin typeface="Century Gothic" pitchFamily="34" charset="0"/>
+                <a:ea typeface="Century Gothic" pitchFamily="34" charset="-122"/>
+                <a:cs typeface="Century Gothic" pitchFamily="34" charset="-120"/>
               </a:rPr>
               <a:t>0.16–0.24</a:t>
             </a:r>
@@ -11539,6 +12140,9 @@
                 <a:solidFill>
                   <a:schemeClr val="accent3"/>
                 </a:solidFill>
+                <a:latin typeface="Century Gothic" pitchFamily="34" charset="0"/>
+                <a:ea typeface="Century Gothic" pitchFamily="34" charset="-122"/>
+                <a:cs typeface="Century Gothic" pitchFamily="34" charset="-120"/>
               </a:rPr>
               <a:t>−14%</a:t>
             </a:r>
@@ -11661,6 +12265,9 @@
                 <a:solidFill>
                   <a:schemeClr val="accent1"/>
                 </a:solidFill>
+                <a:latin typeface="Century Gothic" pitchFamily="34" charset="0"/>
+                <a:ea typeface="Century Gothic" pitchFamily="34" charset="-122"/>
+                <a:cs typeface="Century Gothic" pitchFamily="34" charset="-120"/>
               </a:rPr>
               <a:t>−30%</a:t>
             </a:r>
@@ -11783,6 +12390,9 @@
                 <a:solidFill>
                   <a:schemeClr val="accent1"/>
                 </a:solidFill>
+                <a:latin typeface="Century Gothic" pitchFamily="34" charset="0"/>
+                <a:ea typeface="Century Gothic" pitchFamily="34" charset="-122"/>
+                <a:cs typeface="Century Gothic" pitchFamily="34" charset="-120"/>
               </a:rPr>
               <a:t>−37%</a:t>
             </a:r>
@@ -12409,6 +13019,9 @@
                 <a:solidFill>
                   <a:schemeClr val="accent1"/>
                 </a:solidFill>
+                <a:latin typeface="Century Gothic" pitchFamily="34" charset="0"/>
+                <a:ea typeface="Century Gothic" pitchFamily="34" charset="-122"/>
+                <a:cs typeface="Century Gothic" pitchFamily="34" charset="-120"/>
               </a:rPr>
               <a:t>44 / 47</a:t>
             </a:r>
@@ -12704,6 +13317,9 @@
                 <a:solidFill>
                   <a:schemeClr val="accent1"/>
                 </a:solidFill>
+                <a:latin typeface="Century Gothic" pitchFamily="34" charset="0"/>
+                <a:ea typeface="Century Gothic" pitchFamily="34" charset="-122"/>
+                <a:cs typeface="Century Gothic" pitchFamily="34" charset="-120"/>
               </a:rPr>
               <a:t>+0.28</a:t>
             </a:r>
@@ -12999,6 +13615,9 @@
                 <a:solidFill>
                   <a:schemeClr val="accent1"/>
                 </a:solidFill>
+                <a:latin typeface="Century Gothic" pitchFamily="34" charset="0"/>
+                <a:ea typeface="Century Gothic" pitchFamily="34" charset="-122"/>
+                <a:cs typeface="Century Gothic" pitchFamily="34" charset="-120"/>
               </a:rPr>
               <a:t>41%</a:t>
             </a:r>
@@ -13294,6 +13913,9 @@
                 <a:solidFill>
                   <a:schemeClr val="accent1"/>
                 </a:solidFill>
+                <a:latin typeface="Century Gothic" pitchFamily="34" charset="0"/>
+                <a:ea typeface="Century Gothic" pitchFamily="34" charset="-122"/>
+                <a:cs typeface="Century Gothic" pitchFamily="34" charset="-120"/>
               </a:rPr>
               <a:t>0 of 8</a:t>
             </a:r>
@@ -13589,6 +14211,9 @@
                 <a:solidFill>
                   <a:schemeClr val="accent1"/>
                 </a:solidFill>
+                <a:latin typeface="Century Gothic" pitchFamily="34" charset="0"/>
+                <a:ea typeface="Century Gothic" pitchFamily="34" charset="-122"/>
+                <a:cs typeface="Century Gothic" pitchFamily="34" charset="-120"/>
               </a:rPr>
               <a:t>57%</a:t>
             </a:r>
@@ -14635,6 +15260,9 @@
                 <a:solidFill>
                   <a:schemeClr val="bg1"/>
                 </a:solidFill>
+                <a:latin typeface="Century Gothic" pitchFamily="34" charset="0"/>
+                <a:ea typeface="Century Gothic" pitchFamily="34" charset="-122"/>
+                <a:cs typeface="Century Gothic" pitchFamily="34" charset="-120"/>
               </a:rPr>
               <a:t>0 OF 8</a:t>
             </a:r>
@@ -14802,6 +15430,9 @@
                 <a:solidFill>
                   <a:schemeClr val="bg1"/>
                 </a:solidFill>
+                <a:latin typeface="Century Gothic" pitchFamily="34" charset="0"/>
+                <a:ea typeface="Century Gothic" pitchFamily="34" charset="-122"/>
+                <a:cs typeface="Century Gothic" pitchFamily="34" charset="-120"/>
               </a:rPr>
               <a:t>+1.2% / −1.6%</a:t>
             </a:r>
@@ -15057,7 +15688,7 @@
                   <a:schemeClr val="accent1"/>
                 </a:solidFill>
               </a:rPr>
-              <a:t>31 · 19 · 50, SIZED TO EACH INVESTOR</a:t>
+              <a:t>31 / 19 / 50, SIZED TO EACH INVESTOR</a:t>
             </a:r>
             <a:endParaRPr lang="en-US" sz="2800" dirty="0"/>
           </a:p>
@@ -15204,6 +15835,9 @@
                 <a:solidFill>
                   <a:schemeClr val="accent1"/>
                 </a:solidFill>
+                <a:latin typeface="Century Gothic" pitchFamily="34" charset="0"/>
+                <a:ea typeface="Century Gothic" pitchFamily="34" charset="-122"/>
+                <a:cs typeface="Century Gothic" pitchFamily="34" charset="-120"/>
               </a:rPr>
               <a:t>87%</a:t>
             </a:r>
@@ -15365,6 +15999,9 @@
                 <a:solidFill>
                   <a:schemeClr val="tx1"/>
                 </a:solidFill>
+                <a:latin typeface="Century Gothic" pitchFamily="34" charset="0"/>
+                <a:ea typeface="Century Gothic" pitchFamily="34" charset="-122"/>
+                <a:cs typeface="Century Gothic" pitchFamily="34" charset="-120"/>
               </a:rPr>
               <a:t>44%</a:t>
             </a:r>
@@ -15526,6 +16163,9 @@
                 <a:solidFill>
                   <a:schemeClr val="accent3"/>
                 </a:solidFill>
+                <a:latin typeface="Century Gothic" pitchFamily="34" charset="0"/>
+                <a:ea typeface="Century Gothic" pitchFamily="34" charset="-122"/>
+                <a:cs typeface="Century Gothic" pitchFamily="34" charset="-120"/>
               </a:rPr>
               <a:t>29%</a:t>
             </a:r>
@@ -16218,6 +16858,9 @@
                 <a:solidFill>
                   <a:schemeClr val="accent1"/>
                 </a:solidFill>
+                <a:latin typeface="Century Gothic" pitchFamily="34" charset="0"/>
+                <a:ea typeface="Century Gothic" pitchFamily="34" charset="-122"/>
+                <a:cs typeface="Century Gothic" pitchFamily="34" charset="-120"/>
               </a:rPr>
               <a:t>₹38.1 lakh</a:t>
             </a:r>
@@ -16315,6 +16958,9 @@
                 <a:solidFill>
                   <a:schemeClr val="accent1"/>
                 </a:solidFill>
+                <a:latin typeface="Century Gothic" pitchFamily="34" charset="0"/>
+                <a:ea typeface="Century Gothic" pitchFamily="34" charset="-122"/>
+                <a:cs typeface="Century Gothic" pitchFamily="34" charset="-120"/>
               </a:rPr>
               <a:t>₹64.8 lakh</a:t>
             </a:r>
@@ -16412,6 +17058,9 @@
                 <a:solidFill>
                   <a:schemeClr val="accent1"/>
                 </a:solidFill>
+                <a:latin typeface="Century Gothic" pitchFamily="34" charset="0"/>
+                <a:ea typeface="Century Gothic" pitchFamily="34" charset="-122"/>
+                <a:cs typeface="Century Gothic" pitchFamily="34" charset="-120"/>
               </a:rPr>
               <a:t>19% / 11%</a:t>
             </a:r>
@@ -16789,6 +17438,9 @@
                 <a:solidFill>
                   <a:schemeClr val="accent2"/>
                 </a:solidFill>
+                <a:latin typeface="Century Gothic" pitchFamily="34" charset="0"/>
+                <a:ea typeface="Century Gothic" pitchFamily="34" charset="-122"/>
+                <a:cs typeface="Century Gothic" pitchFamily="34" charset="-120"/>
               </a:rPr>
               <a:t>BUY</a:t>
             </a:r>
@@ -16897,6 +17549,9 @@
                 <a:solidFill>
                   <a:schemeClr val="bg1"/>
                 </a:solidFill>
+                <a:latin typeface="Century Gothic" pitchFamily="34" charset="0"/>
+                <a:ea typeface="Century Gothic" pitchFamily="34" charset="-122"/>
+                <a:cs typeface="Century Gothic" pitchFamily="34" charset="-120"/>
               </a:rPr>
               <a:t>HOLD</a:t>
             </a:r>
@@ -17005,6 +17660,9 @@
                 <a:solidFill>
                   <a:schemeClr val="bg1"/>
                 </a:solidFill>
+                <a:latin typeface="Century Gothic" pitchFamily="34" charset="0"/>
+                <a:ea typeface="Century Gothic" pitchFamily="34" charset="-122"/>
+                <a:cs typeface="Century Gothic" pitchFamily="34" charset="-120"/>
               </a:rPr>
               <a:t>HOLD</a:t>
             </a:r>
@@ -17077,6 +17735,9 @@
                 <a:solidFill>
                   <a:schemeClr val="accent1"/>
                 </a:solidFill>
+                <a:latin typeface="Century Gothic" pitchFamily="34" charset="0"/>
+                <a:ea typeface="Century Gothic" pitchFamily="34" charset="-122"/>
+                <a:cs typeface="Century Gothic" pitchFamily="34" charset="-120"/>
               </a:rPr>
               <a:t>BUY THE PORTFOLIO SLOWLY, THROUGH THE SIP</a:t>
             </a:r>
@@ -17596,7 +18257,7 @@
     </a:clrScheme>
     <a:fontScheme name="SA Portfolio">
       <a:majorFont>
-        <a:latin typeface="Arial"/>
+        <a:latin typeface="Century Gothic"/>
         <a:ea typeface=""/>
         <a:cs typeface=""/>
         <a:font script="Jpan" typeface="游ゴシック Light"/>
@@ -17648,7 +18309,7 @@
         <a:font script="Tfng" typeface="Ebrima"/>
       </a:majorFont>
       <a:minorFont>
-        <a:latin typeface="Arial"/>
+        <a:latin typeface="Calibri"/>
         <a:ea typeface=""/>
         <a:cs typeface=""/>
         <a:font script="Jpan" typeface="游ゴシック"/>

--- a/deliverables/out/SA_Portfolio_Deck.pptx
+++ b/deliverables/out/SA_Portfolio_Deck.pptx
@@ -119,12 +119,12 @@
   <p:extLst>
     <p:ext uri="{521415D9-36F7-43E2-AB2F-B90AF26B5E84}">
       <p14:sectionLst xmlns:p14="http://schemas.microsoft.com/office/powerpoint/2010/main">
-        <p14:section name="Opening" id="{a2ebe612-3b85-6819-1851-0bd92cb33dcf}">
+        <p14:section name="Opening" id="{bd52a83e-ac11-ff0b-6c27-be1d4a454222}">
           <p14:sldIdLst>
             <p14:sldId id="256"/>
           </p14:sldIdLst>
         </p14:section>
-        <p14:section name="Analysis" id="{c594f6af-33d4-89a7-420d-1f9eed2744b9}">
+        <p14:section name="Analysis" id="{3f7ad85b-d6d2-51b4-fcc2-3d429c846987}">
           <p14:sldIdLst>
             <p14:sldId id="257"/>
             <p14:sldId id="258"/>
@@ -133,18 +133,18 @@
             <p14:sldId id="261"/>
           </p14:sldIdLst>
         </p14:section>
-        <p14:section name="Portfolio" id="{9ccc9df6-dce6-8fd3-0163-8b05b6400012}">
+        <p14:section name="Portfolio" id="{edee6fa6-4362-276c-e54d-e4183da47cba}">
           <p14:sldIdLst>
             <p14:sldId id="262"/>
             <p14:sldId id="263"/>
           </p14:sldIdLst>
         </p14:section>
-        <p14:section name="Close" id="{3092bfba-b834-cb05-a38b-28ebf7d66a21}">
+        <p14:section name="Close" id="{ca3d866c-ada8-592e-63a3-ceef03ee3b1c}">
           <p14:sldIdLst>
             <p14:sldId id="264"/>
           </p14:sldIdLst>
         </p14:section>
-        <p14:section name="Appendix" id="{572450e6-7973-c434-6eb1-5902ad6ac4e2}">
+        <p14:section name="Appendix" id="{ec9b4dbf-43c5-aa9e-23ff-6dba0df21ad7}">
           <p14:sldIdLst>
             <p14:sldId id="265"/>
             <p14:sldId id="266"/>
@@ -2440,7 +2440,7 @@
           <a:p>
             <a:r>
               <a:rPr lang="en-US" dirty="0"/>
-              <a:t>[2:00] DEMO DRIVER: open the dashboard on Submission data, so the screen matches the slides. (1) AI insights: 'This is a year of headlines and every earnings call, scored by FinBERT. Notice HUL's management sounds far more positive than the analysts asking the questions.' (2) Risk: 'The heatmap shows why these three diversify; in all four sell-offs since 2020 our portfolio fell less than the Nifty.' (3) Ask the portfolio: pick 'Why is ICICI Bank the largest weight?'. 'Every number in the answer cites the file it came from.' (4) Sidebar: move risk aversion from 4 to 2. 'This is your own portfolio: your share in P goes from 44% to 87%.' Then flip the data selector to Latest and say what has changed since submission. If any step takes more than 10 seconds, drop down the backup ladder without apologising.</a:t>
+              <a:t>[2:00] DEMO DRIVER: open the dashboard (Submission data, so the screen matches the slides). (1) Questionnaire: 'Ten questions turn your answers into a risk-aversion number, A.' Click the middle answer each time (that is our Balanced investor, A = 4) and press BUILD MY PORTFOLIO. (2) Portfolio: 'For A = 4, one lakh splits into ₹13,382 HUL, ₹8,394 Sun Pharma, ₹21,833 ICICI Bank and ₹56,392 of T-bills. The one-year 95% VaR is ₹5,582.' Now move A from 4 to 2: 'your share in P goes from 44% to 87%, and every number recomputes: the rupee split, the VaR, the Monte Carlo fan and the 15-year SIP.' (3) Risk tab: 'In a COVID-style crash this portfolio would have lost about ₹15,080; our stocks fell less than the Nifty in all four sell-offs.' (4) Ask: pick 'Why is ICICI Bank the largest weight?'. 'Every number in the answer cites the file it came from.' Then flip the data selector to LATEST and say what has changed since submission. If any step takes more than 10 seconds, drop down the backup ladder without apologising.</a:t>
             </a:r>
             <a:endParaRPr lang="en-US" dirty="0"/>
           </a:p>
@@ -9421,18 +9421,18 @@
         </p:nvSpPr>
         <p:spPr>
           <a:xfrm>
-            <a:off x="548640" y="2377440"/>
-            <a:ext cx="3593592" cy="2468880"/>
+            <a:off x="521208" y="2511362"/>
+            <a:ext cx="3648456" cy="2201037"/>
           </a:xfrm>
           <a:prstGeom prst="rect">
             <a:avLst/>
           </a:prstGeom>
           <a:solidFill>
-            <a:schemeClr val="bg1"/>
+            <a:schemeClr val="accent5"/>
           </a:solidFill>
           <a:ln w="12700">
             <a:solidFill>
-              <a:schemeClr val="bg1"/>
+              <a:schemeClr val="accent5"/>
             </a:solidFill>
             <a:prstDash val="solid"/>
           </a:ln>
@@ -9440,7 +9440,7 @@
       </p:sp>
       <p:pic>
         <p:nvPicPr>
-          <p:cNvPr id="6" name="backup-1" descr="C:\Users\abhay.ABHAYSLAPTOP\Desktop\year 3\sem 5\Security_Analysis\sa-portfolio\deliverables\assets\dash_overview_crop.png">    </p:cNvPr>
+          <p:cNvPr id="6" name="backup-1" descr="C:\Users\abhay.ABHAYSLAPTOP\Desktop\year 3\sem 5\Security_Analysis\sa-portfolio\deliverables\assets\dash_quiz.png">    </p:cNvPr>
           <p:cNvPicPr>
             <a:picLocks noChangeAspect="1"/>
           </p:cNvPicPr>
@@ -9454,8 +9454,8 @@
         </p:blipFill>
         <p:spPr>
           <a:xfrm>
-            <a:off x="585216" y="2414016"/>
-            <a:ext cx="3520440" cy="2395728"/>
+            <a:off x="548640" y="2538794"/>
+            <a:ext cx="3593592" cy="2146173"/>
           </a:xfrm>
           <a:prstGeom prst="rect">
             <a:avLst/>
@@ -9492,7 +9492,7 @@
                   <a:schemeClr val="accent2"/>
                 </a:solidFill>
               </a:rPr>
-              <a:t>OVERVIEW: P, VALUATION, VERDICTS</a:t>
+              <a:t>STEP 1: RISK QUESTIONNAIRE</a:t>
             </a:r>
             <a:endParaRPr lang="en-US" sz="1000" dirty="0"/>
           </a:p>
@@ -9506,18 +9506,18 @@
         </p:nvSpPr>
         <p:spPr>
           <a:xfrm>
-            <a:off x="4297680" y="2377440"/>
-            <a:ext cx="3593592" cy="2468880"/>
+            <a:off x="4270248" y="2511362"/>
+            <a:ext cx="3648456" cy="2201037"/>
           </a:xfrm>
           <a:prstGeom prst="rect">
             <a:avLst/>
           </a:prstGeom>
           <a:solidFill>
-            <a:schemeClr val="bg1"/>
+            <a:schemeClr val="accent5"/>
           </a:solidFill>
           <a:ln w="12700">
             <a:solidFill>
-              <a:schemeClr val="bg1"/>
+              <a:schemeClr val="accent5"/>
             </a:solidFill>
             <a:prstDash val="solid"/>
           </a:ln>
@@ -9525,7 +9525,7 @@
       </p:sp>
       <p:pic>
         <p:nvPicPr>
-          <p:cNvPr id="9" name="backup-2" descr="C:\Users\abhay.ABHAYSLAPTOP\Desktop\year 3\sem 5\Security_Analysis\sa-portfolio\deliverables\assets\dash_risk_crop.png">    </p:cNvPr>
+          <p:cNvPr id="9" name="backup-2" descr="C:\Users\abhay.ABHAYSLAPTOP\Desktop\year 3\sem 5\Security_Analysis\sa-portfolio\deliverables\assets\dash_portfolio.png">    </p:cNvPr>
           <p:cNvPicPr>
             <a:picLocks noChangeAspect="1"/>
           </p:cNvPicPr>
@@ -9539,8 +9539,8 @@
         </p:blipFill>
         <p:spPr>
           <a:xfrm>
-            <a:off x="4334256" y="2414016"/>
-            <a:ext cx="3520440" cy="2395728"/>
+            <a:off x="4297680" y="2538794"/>
+            <a:ext cx="3593592" cy="2146173"/>
           </a:xfrm>
           <a:prstGeom prst="rect">
             <a:avLst/>
@@ -9577,7 +9577,7 @@
                   <a:schemeClr val="accent2"/>
                 </a:solidFill>
               </a:rPr>
-              <a:t>RISK: HEATMAPS AND STRESS</a:t>
+              <a:t>YOUR PORTFOLIO IN RUPEES</a:t>
             </a:r>
             <a:endParaRPr lang="en-US" sz="1000" dirty="0"/>
           </a:p>
@@ -9591,18 +9591,18 @@
         </p:nvSpPr>
         <p:spPr>
           <a:xfrm>
-            <a:off x="8046720" y="2377440"/>
-            <a:ext cx="3593592" cy="2468880"/>
+            <a:off x="8019288" y="2511362"/>
+            <a:ext cx="3648456" cy="2201037"/>
           </a:xfrm>
           <a:prstGeom prst="rect">
             <a:avLst/>
           </a:prstGeom>
           <a:solidFill>
-            <a:schemeClr val="bg1"/>
+            <a:schemeClr val="accent5"/>
           </a:solidFill>
           <a:ln w="12700">
             <a:solidFill>
-              <a:schemeClr val="bg1"/>
+              <a:schemeClr val="accent5"/>
             </a:solidFill>
             <a:prstDash val="solid"/>
           </a:ln>
@@ -9610,7 +9610,7 @@
       </p:sp>
       <p:pic>
         <p:nvPicPr>
-          <p:cNvPr id="12" name="backup-3" descr="C:\Users\abhay.ABHAYSLAPTOP\Desktop\year 3\sem 5\Security_Analysis\sa-portfolio\deliverables\assets\dash_ask_crop.png">    </p:cNvPr>
+          <p:cNvPr id="12" name="backup-3" descr="C:\Users\abhay.ABHAYSLAPTOP\Desktop\year 3\sem 5\Security_Analysis\sa-portfolio\deliverables\assets\dash_risk.png">    </p:cNvPr>
           <p:cNvPicPr>
             <a:picLocks noChangeAspect="1"/>
           </p:cNvPicPr>
@@ -9624,8 +9624,8 @@
         </p:blipFill>
         <p:spPr>
           <a:xfrm>
-            <a:off x="8083296" y="2414016"/>
-            <a:ext cx="3520440" cy="2395728"/>
+            <a:off x="8046720" y="2538794"/>
+            <a:ext cx="3593592" cy="2146173"/>
           </a:xfrm>
           <a:prstGeom prst="rect">
             <a:avLst/>
@@ -9662,7 +9662,7 @@
                   <a:schemeClr val="accent2"/>
                 </a:solidFill>
               </a:rPr>
-              <a:t>ASK THE PORTFOLIO: SAVED ANSWERS</a:t>
+              <a:t>RISK: HEATMAPS AND STRESS</a:t>
             </a:r>
             <a:endParaRPr lang="en-US" sz="1000" dirty="0"/>
           </a:p>
@@ -14543,7 +14543,7 @@
                   <a:schemeClr val="bg1"/>
                 </a:solidFill>
               </a:rPr>
-              <a:t>AI INSIGHTS</a:t>
+              <a:t>RISK QUESTIONNAIRE</a:t>
             </a:r>
             <a:endParaRPr lang="en-US" sz="1500" dirty="0"/>
           </a:p>
@@ -14557,7 +14557,7 @@
                   <a:schemeClr val="accent6"/>
                 </a:solidFill>
               </a:rPr>
-              <a:t>Monthly sentiment; news framing</a:t>
+              <a:t>Ten answers set your risk aversion A</a:t>
             </a:r>
             <a:endParaRPr lang="en-US" sz="1500" dirty="0"/>
           </a:p>
@@ -14629,7 +14629,7 @@
                   <a:schemeClr val="bg1"/>
                 </a:solidFill>
               </a:rPr>
-              <a:t>RISK</a:t>
+              <a:t>YOUR PORTFOLIO</a:t>
             </a:r>
             <a:endParaRPr lang="en-US" sz="1500" dirty="0"/>
           </a:p>
@@ -14643,7 +14643,7 @@
                   <a:schemeClr val="accent6"/>
                 </a:solidFill>
               </a:rPr>
-              <a:t>Correlation heatmap; stress tests</a:t>
+              <a:t>The rupee split for your A; slide A from 4 to 2: 44% → 87% in P</a:t>
             </a:r>
             <a:endParaRPr lang="en-US" sz="1500" dirty="0"/>
           </a:p>
@@ -14715,7 +14715,7 @@
                   <a:schemeClr val="bg1"/>
                 </a:solidFill>
               </a:rPr>
-              <a:t>ASK THE PORTFOLIO</a:t>
+              <a:t>RISK</a:t>
             </a:r>
             <a:endParaRPr lang="en-US" sz="1500" dirty="0"/>
           </a:p>
@@ -14729,7 +14729,7 @@
                   <a:schemeClr val="accent6"/>
                 </a:solidFill>
               </a:rPr>
-              <a:t>One question, answered with its sources</a:t>
+              <a:t>Your rupee loss in four real sell-offs</a:t>
             </a:r>
             <a:endParaRPr lang="en-US" sz="1500" dirty="0"/>
           </a:p>
@@ -14801,7 +14801,7 @@
                   <a:schemeClr val="bg1"/>
                 </a:solidFill>
               </a:rPr>
-              <a:t>YOUR OWN PORTFOLIO</a:t>
+              <a:t>ASK THE PORTFOLIO</a:t>
             </a:r>
             <a:endParaRPr lang="en-US" sz="1500" dirty="0"/>
           </a:p>
@@ -14815,7 +14815,7 @@
                   <a:schemeClr val="accent6"/>
                 </a:solidFill>
               </a:rPr>
-              <a:t>Slide A from 4 to 2: your share in P goes from 44% to 87%</a:t>
+              <a:t>One question, answered with its sources</a:t>
             </a:r>
             <a:endParaRPr lang="en-US" sz="1500" dirty="0"/>
           </a:p>
@@ -14898,7 +14898,7 @@
       </p:sp>
       <p:pic>
         <p:nvPicPr>
-          <p:cNvPr id="15" name="demo-screenshot" descr="C:\Users\abhay.ABHAYSLAPTOP\Desktop\year 3\sem 5\Security_Analysis\sa-portfolio\deliverables\assets\dash_ai.png">    </p:cNvPr>
+          <p:cNvPr id="15" name="demo-screenshot" descr="C:\Users\abhay.ABHAYSLAPTOP\Desktop\year 3\sem 5\Security_Analysis\sa-portfolio\deliverables\assets\dash_portfolio.png">    </p:cNvPr>
           <p:cNvPicPr>
             <a:picLocks noChangeAspect="1"/>
           </p:cNvPicPr>
@@ -14912,8 +14912,8 @@
         </p:blipFill>
         <p:spPr>
           <a:xfrm>
-            <a:off x="4572000" y="960120"/>
-            <a:ext cx="7022592" cy="4169664"/>
+            <a:off x="4592415" y="960120"/>
+            <a:ext cx="6981763" cy="4169664"/>
           </a:xfrm>
           <a:prstGeom prst="rect">
             <a:avLst/>
